--- a/docs/entreprise/deck/Quantinvo-dossier-DSI.pptx
+++ b/docs/entreprise/deck/Quantinvo-dossier-DSI.pptx
@@ -2494,7 +2494,7 @@
                 <a:ea typeface="Arial" pitchFamily="34" charset="-122"/>
                 <a:cs typeface="Arial" pitchFamily="34" charset="-120"/>
               </a:rPr>
-              <a:t>En cas de violation, c'est vous qui notifiez la CNIL sous 72 heures ; nous vous prévenons sans délai et vous donnons les éléments.</a:t>
+              <a:t>En cas de violation, c'est vous qui notifiez la CNIL sous 72 heures ; nous vous prévenons sans délai et vous donnons les éléments.</a:t>
             </a:r>
             <a:endParaRPr lang="en-US" sz="1150" dirty="0"/>
           </a:p>
@@ -2588,7 +2588,7 @@
                 <a:ea typeface="Arial" pitchFamily="34" charset="-122"/>
                 <a:cs typeface="Arial" pitchFamily="34" charset="-120"/>
               </a:rPr>
-              <a:t>Les droits sont outillés : chaque personne télécharge ses données depuis son compte ; la suppression d'un compte conserve les comptages mais les détache du nom.</a:t>
+              <a:t>Les droits sont outillés : chaque personne télécharge ses données depuis son compte ; la suppression d'un compte conserve les comptages mais les détache du nom.</a:t>
             </a:r>
             <a:endParaRPr lang="en-US" sz="1150" dirty="0"/>
           </a:p>
@@ -2612,7 +2612,7 @@
                 <a:ea typeface="Arial" pitchFamily="34" charset="-122"/>
                 <a:cs typeface="Arial" pitchFamily="34" charset="-120"/>
               </a:rPr>
-              <a:t>Durées : comptes tant qu'ils sont actifs, journaux un an, demandes et invitations purgées. Le suivi en direct n'est jamais enregistré.</a:t>
+              <a:t>Durées : comptes tant qu'ils sont actifs, journaux un an, demandes et invitations purgées. Le suivi en direct n'est jamais enregistré.</a:t>
             </a:r>
             <a:endParaRPr lang="en-US" sz="1150" dirty="0"/>
           </a:p>
@@ -3106,7 +3106,7 @@
                 <a:ea typeface="Arial" pitchFamily="34" charset="-122"/>
                 <a:cs typeface="Arial" pitchFamily="34" charset="-120"/>
               </a:rPr>
-              <a:t>Les comptes sont locaux, créés par invitation. Techniquement possible ; pas planifié tant qu'un client ne le demande pas.</a:t>
+              <a:t>Les comptes sont locaux, créés par invitation. Techniquement possible ; pas planifié tant qu'un client ne le demande pas.</a:t>
             </a:r>
             <a:endParaRPr lang="en-US" sz="1200" dirty="0"/>
           </a:p>
@@ -3192,7 +3192,7 @@
                 <a:ea typeface="Arial" pitchFamily="34" charset="-122"/>
                 <a:cs typeface="Arial" pitchFamily="34" charset="-120"/>
               </a:rPr>
-              <a:t>Le build est en cours. Les identifiants sont réservés ; la fiche MDM le signale.</a:t>
+              <a:t>Le build est en cours. Les identifiants sont réservés ; la fiche MDM le signale.</a:t>
             </a:r>
             <a:endParaRPr lang="en-US" sz="1200" dirty="0"/>
           </a:p>
@@ -3235,7 +3235,7 @@
                 <a:ea typeface="Arial" pitchFamily="34" charset="-122"/>
                 <a:cs typeface="Arial" pitchFamily="34" charset="-120"/>
               </a:rPr>
-              <a:t>L'échange se fait par fichiers : import CSV ou Excel, export Excel. Un connecteur viendra avec le premier client qui en a besoin, pas avant.</a:t>
+              <a:t>L'échange se fait par fichiers : import CSV ou Excel, export Excel. Un connecteur viendra avec le premier client qui en a besoin, pas avant.</a:t>
             </a:r>
             <a:endParaRPr lang="en-US" sz="1200" dirty="0"/>
           </a:p>
@@ -4440,7 +4440,7 @@
                 <a:ea typeface="Arial" pitchFamily="34" charset="-122"/>
                 <a:cs typeface="Arial" pitchFamily="34" charset="-120"/>
               </a:rPr>
-              <a:t>Scan par la caméra ; comptages gardés sur l’appareil hors réseau, renvoyés au retour.</a:t>
+              <a:t>Scan par la caméra ; comptages gardés sur l’appareil hors réseau, renvoyés au retour.</a:t>
             </a:r>
             <a:endParaRPr lang="en-US" sz="1050" dirty="0"/>
           </a:p>
@@ -6867,7 +6867,7 @@
                 <a:ea typeface="Arial" pitchFamily="34" charset="-122"/>
                 <a:cs typeface="Arial" pitchFamily="34" charset="-120"/>
               </a:rPr>
-              <a:t>Workspace ONE, Intune, SOTI, Ivanti, Jamf ou autre : il n'y a pas de version spéciale à demander, pas d'installation manuelle, pas de compte Apple ou Google personnel sur les appareils.</a:t>
+              <a:t>Workspace ONE, Intune, SOTI, Ivanti, Jamf ou autre : il n'y a pas de version spéciale à demander, pas d'installation manuelle, pas de compte Apple ou Google personnel sur les appareils.</a:t>
             </a:r>
             <a:endParaRPr lang="en-US" sz="1200" dirty="0"/>
           </a:p>
@@ -7664,7 +7664,7 @@
                 <a:ea typeface="Arial" pitchFamily="34" charset="-122"/>
                 <a:cs typeface="Arial" pitchFamily="34" charset="-120"/>
               </a:rPr>
-              <a:t>Depuis Apple Business Manager, « Apps et livres » : vous attribuez les licences, votre MDM distribue, l'installation est silencieuse. Si votre politique interdit les applications publiques, nous publions une application personnalisée réservée à votre organisation.</a:t>
+              <a:t>Depuis Apple Business Manager, « Apps et livres » : vous attribuez les licences, votre MDM distribue, l'installation est silencieuse. Si votre politique interdit les applications publiques, nous publions une application personnalisée réservée à votre organisation.</a:t>
             </a:r>
             <a:endParaRPr lang="en-US" sz="1150" dirty="0"/>
           </a:p>
@@ -7707,7 +7707,7 @@
                 <a:ea typeface="Arial" pitchFamily="34" charset="-122"/>
                 <a:cs typeface="Arial" pitchFamily="34" charset="-120"/>
               </a:rPr>
-              <a:t>Par Managed Google Play, ou en chargeant l'APK que nous vous remettons comme application interne. Zebra, Honeywell et Datalogic fonctionnent ; le mode « application unique » est compatible.</a:t>
+              <a:t>Par Managed Google Play, ou en chargeant l'APK que nous vous remettons comme application interne. Zebra, Honeywell et Datalogic fonctionnent ; le mode « application unique » est compatible.</a:t>
             </a:r>
             <a:endParaRPr lang="en-US" sz="1150" dirty="0"/>
           </a:p>
@@ -8028,7 +8028,7 @@
                 <a:ea typeface="Arial" pitchFamily="34" charset="-122"/>
                 <a:cs typeface="Arial" pitchFamily="34" charset="-120"/>
               </a:rPr>
-              <a:t>Sans les trois premiers, l'application s'installe et ne sert à rien. Personne ne vous le dira : le compteur verra juste un écran noir, ou un téléphone qui ne synchronise pas.</a:t>
+              <a:t>Sans les trois premiers, l'application s'installe et ne sert à rien. Personne ne vous le dira : le compteur verra juste un écran noir, ou un téléphone qui ne synchronise pas.</a:t>
             </a:r>
             <a:endParaRPr lang="en-US" sz="1200" dirty="0"/>
           </a:p>
@@ -8406,7 +8406,7 @@
                 <a:ea typeface="Arial" pitchFamily="34" charset="-122"/>
                 <a:cs typeface="Arial" pitchFamily="34" charset="-120"/>
               </a:rPr>
-              <a:t>L'application fonctionne hors ligne : en réserve, en chambre froide, les comptages attendent sur l'appareil et partent au retour du réseau. Un effacement ou une désinstallation pendant cette fenêtre perd ce travail. C'est propre à Quantinvo, et c'est le point qu'on oublie.</a:t>
+              <a:t>L'application fonctionne hors ligne : en réserve, en chambre froide, les comptages attendent sur l'appareil et partent au retour du réseau. Un effacement ou une désinstallation pendant cette fenêtre perd ce travail. C'est propre à Quantinvo, et c'est le point qu'on oublie.</a:t>
             </a:r>
             <a:endParaRPr lang="en-US" sz="1150" dirty="0"/>
           </a:p>
@@ -8532,7 +8532,7 @@
                 <a:ea typeface="Arial" pitchFamily="34" charset="-122"/>
                 <a:cs typeface="Arial" pitchFamily="34" charset="-120"/>
               </a:rPr>
-              <a:t>Elles servent à prévenir quelqu'un qu'il a été invité à un inventaire. Sans elles, tout fonctionne ; la personne ouvre simplement l'application pour voir.</a:t>
+              <a:t>Elles servent à prévenir quelqu'un qu'il a été invité à un inventaire. Sans elles, tout fonctionne ; la personne ouvre simplement l'application pour voir.</a:t>
             </a:r>
             <a:endParaRPr lang="en-US" sz="1150" dirty="0"/>
           </a:p>
@@ -9340,7 +9340,7 @@
                 <a:ea typeface="Arial" pitchFamily="34" charset="-122"/>
                 <a:cs typeface="Arial" pitchFamily="34" charset="-120"/>
               </a:rPr>
-              <a:t>Douze caractères minimum, majuscule, minuscule, chiffre, symbole ; refus des mots de passe présents dans les fuites connues. Changer le sien exige l'ancien.</a:t>
+              <a:t>Douze caractères minimum, majuscule, minuscule, chiffre, symbole ; refus des mots de passe présents dans les fuites connues. Changer le sien exige l'ancien.</a:t>
             </a:r>
             <a:endParaRPr lang="en-US" sz="1150" dirty="0"/>
           </a:p>
@@ -9937,7 +9937,7 @@
                 <a:ea typeface="Arial" pitchFamily="34" charset="-122"/>
                 <a:cs typeface="Arial" pitchFamily="34" charset="-120"/>
               </a:rPr>
-              <a:t>En-têtes de sécurité posés (politique de contenu, interdiction d'intégration dans un cadre, etc.). Aucun traceur, aucune mesure d'audience : il n'y a pas de bandeau cookies parce qu'il n'y a pas de cookies à déclarer.</a:t>
+              <a:t>En-têtes de sécurité posés (politique de contenu, interdiction d'intégration dans un cadre, etc.). Aucun traceur, aucune mesure d'audience : il n'y a pas de bandeau cookies parce qu'il n'y a pas de cookies à déclarer.</a:t>
             </a:r>
             <a:endParaRPr lang="en-US" sz="1250" dirty="0"/>
           </a:p>
@@ -10452,7 +10452,7 @@
                 <a:ea typeface="Arial" pitchFamily="34" charset="-122"/>
                 <a:cs typeface="Arial" pitchFamily="34" charset="-120"/>
               </a:rPr>
-              <a:t>Les scans sont enregistrés sur le téléphone et renvoyés automatiquement au retour du réseau, dans l'ordre. Le compteur voit ce qui attend et ce qui est parti. Une session expirée n'efface rien : la file attend la reconnexion.</a:t>
+              <a:t>Les scans sont enregistrés sur le téléphone et renvoyés automatiquement au retour du réseau, dans l'ordre. Le compteur voit ce qui attend et ce qui est parti. Une session expirée n'efface rien : la file attend la reconnexion.</a:t>
             </a:r>
             <a:endParaRPr lang="en-US" sz="1200" dirty="0"/>
           </a:p>
@@ -10495,7 +10495,7 @@
                 <a:ea typeface="Arial" pitchFamily="34" charset="-122"/>
                 <a:cs typeface="Arial" pitchFamily="34" charset="-120"/>
               </a:rPr>
-              <a:t>Chaque téléphone envoie un signal toutes les 5 à 30 secondes ; il n'écoute rien. Seul le tableau de bord écoute. Le coût du suivi croît avec le nombre de téléphones, pas avec son carré.</a:t>
+              <a:t>Chaque téléphone envoie un signal toutes les 5 à 30 secondes ; il n'écoute rien. Seul le tableau de bord écoute. Le coût du suivi croît avec le nombre de téléphones, pas avec son carré.</a:t>
             </a:r>
             <a:endParaRPr lang="en-US" sz="1200" dirty="0"/>
           </a:p>
@@ -10581,7 +10581,7 @@
                 <a:ea typeface="Arial" pitchFamily="34" charset="-122"/>
                 <a:cs typeface="Arial" pitchFamily="34" charset="-120"/>
               </a:rPr>
-              <a:t>Un référentiel de plusieurs dizaines de milliers de références s'importe par lots. Pour un réseau de plusieurs centaines de magasins comptant le même jour, nous montons la capacité de la base : c'est un réglage, pas un chantier.</a:t>
+              <a:t>Un référentiel de plusieurs dizaines de milliers de références s'importe par lots. Pour un réseau de plusieurs centaines de magasins comptant le même jour, nous montons la capacité de la base : c'est un réglage, pas un chantier.</a:t>
             </a:r>
             <a:endParaRPr lang="en-US" sz="1200" dirty="0"/>
           </a:p>

--- a/docs/entreprise/deck/Quantinvo-dossier-DSI.pptx
+++ b/docs/entreprise/deck/Quantinvo-dossier-DSI.pptx
@@ -606,7 +606,7 @@
           <a:p>
             <a:r>
               <a:rPr lang="en-US" dirty="0"/>
-              <a:t>Trois gestes, dix minutes de prise en main, aucun briefing matériel. C'est ce qui permet de faire compter des équipes de vente plutôt qu'un service spécialisé. Un guide illustré complet est remis après la signature.</a:t>
+              <a:t>Trois gestes, dix minutes de prise en main, aucun briefing matériel. C'est ce qui permet de faire compter des équipes de vente plutôt qu'un service spécialisé. Le guide illustré complet est remis après la signature — et depuis septembre 2026 il vit aussi dans le produit : le superviseur l'ouvre depuis sa boîte à outils, sur le site, et peut l'imprimer pour la réserve.</a:t>
             </a:r>
             <a:endParaRPr lang="en-US" dirty="0"/>
           </a:p>
@@ -3188,7 +3188,7 @@
                 <a:ea typeface="Arial" pitchFamily="34" charset="-122"/>
                 <a:cs typeface="Arial" pitchFamily="34" charset="-120"/>
               </a:rPr>
-              <a:t>Quantinvo · dossier technique · août 2026</a:t>
+              <a:t>Quantinvo · dossier technique · septembre 2026</a:t>
             </a:r>
             <a:endParaRPr lang="en-US" sz="900" dirty="0"/>
           </a:p>
@@ -4125,7 +4125,7 @@
                 <a:ea typeface="Arial" pitchFamily="34" charset="-122"/>
                 <a:cs typeface="Arial" pitchFamily="34" charset="-120"/>
               </a:rPr>
-              <a:t>Quantinvo · dossier technique · août 2026</a:t>
+              <a:t>Quantinvo · dossier technique · septembre 2026</a:t>
             </a:r>
             <a:endParaRPr lang="en-US" sz="900" dirty="0"/>
           </a:p>
@@ -4726,7 +4726,7 @@
                 <a:ea typeface="Arial" pitchFamily="34" charset="-122"/>
                 <a:cs typeface="Arial" pitchFamily="34" charset="-120"/>
               </a:rPr>
-              <a:t>Quantinvo · dossier technique · août 2026</a:t>
+              <a:t>Quantinvo · dossier technique · septembre 2026</a:t>
             </a:r>
             <a:endParaRPr lang="en-US" sz="900" dirty="0"/>
           </a:p>
@@ -5280,7 +5280,7 @@
                 <a:ea typeface="Arial" pitchFamily="34" charset="-122"/>
                 <a:cs typeface="Arial" pitchFamily="34" charset="-120"/>
               </a:rPr>
-              <a:t>Quantinvo · dossier technique · août 2026</a:t>
+              <a:t>Quantinvo · dossier technique · septembre 2026</a:t>
             </a:r>
             <a:endParaRPr lang="en-US" sz="900" dirty="0"/>
           </a:p>
@@ -5795,7 +5795,7 @@
                 <a:ea typeface="Arial" pitchFamily="34" charset="-122"/>
                 <a:cs typeface="Arial" pitchFamily="34" charset="-120"/>
               </a:rPr>
-              <a:t>Quantinvo · dossier technique · août 2026</a:t>
+              <a:t>Quantinvo · dossier technique · septembre 2026</a:t>
             </a:r>
             <a:endParaRPr lang="en-US" sz="900" dirty="0"/>
           </a:p>
@@ -6495,7 +6495,7 @@
                 <a:ea typeface="Arial" pitchFamily="34" charset="-122"/>
                 <a:cs typeface="Arial" pitchFamily="34" charset="-120"/>
               </a:rPr>
-              <a:t>Quantinvo · dossier technique · août 2026</a:t>
+              <a:t>Quantinvo · dossier technique · septembre 2026</a:t>
             </a:r>
             <a:endParaRPr lang="en-US" sz="900" dirty="0"/>
           </a:p>
@@ -7053,7 +7053,7 @@
                 <a:ea typeface="Arial" pitchFamily="34" charset="-122"/>
                 <a:cs typeface="Arial" pitchFamily="34" charset="-120"/>
               </a:rPr>
-              <a:t>Quantinvo · dossier technique · août 2026</a:t>
+              <a:t>Quantinvo · dossier technique · septembre 2026</a:t>
             </a:r>
             <a:endParaRPr lang="en-US" sz="900" dirty="0"/>
           </a:p>
@@ -7296,7 +7296,7 @@
                 <a:ea typeface="Arial" pitchFamily="34" charset="-122"/>
                 <a:cs typeface="Arial" pitchFamily="34" charset="-120"/>
               </a:rPr>
-              <a:t>La fiche de déploiement MDM pour l'équipe parc. La politique de confidentialité, les clauses article 28 et les synthèses d'audit pour votre DPO. Le guide de prise en main pour vos superviseurs. La note d'information aux salariés pour vos RH. Et un interlocuteur qui répond.</a:t>
+              <a:t>La fiche de déploiement MDM pour l'équipe parc. La politique de confidentialité, les clauses article 28 et les synthèses d'audit pour votre DPO. Le guide de prise en main pour vos superviseurs — remis en présentation, et consultable à tout moment depuis leur espace, où il s'imprime pour la réserve. La note d'information aux salariés pour vos RH. Et un interlocuteur qui répond.</a:t>
             </a:r>
             <a:endParaRPr lang="en-US" sz="1450" dirty="0"/>
           </a:p>
@@ -7808,7 +7808,7 @@
                 <a:ea typeface="Arial" pitchFamily="34" charset="-122"/>
                 <a:cs typeface="Arial" pitchFamily="34" charset="-120"/>
               </a:rPr>
-              <a:t>Quantinvo · dossier technique · août 2026</a:t>
+              <a:t>Quantinvo · dossier technique · septembre 2026</a:t>
             </a:r>
             <a:endParaRPr lang="en-US" sz="900" dirty="0"/>
           </a:p>
@@ -9007,7 +9007,7 @@
                 <a:ea typeface="Arial" pitchFamily="34" charset="-122"/>
                 <a:cs typeface="Arial" pitchFamily="34" charset="-120"/>
               </a:rPr>
-              <a:t>Quantinvo · dossier technique · août 2026</a:t>
+              <a:t>Quantinvo · dossier technique · septembre 2026</a:t>
             </a:r>
             <a:endParaRPr lang="en-US" sz="900" dirty="0"/>
           </a:p>
@@ -10470,7 +10470,7 @@
                 <a:ea typeface="Arial" pitchFamily="34" charset="-122"/>
                 <a:cs typeface="Arial" pitchFamily="34" charset="-120"/>
               </a:rPr>
-              <a:t>Quantinvo · dossier technique · août 2026</a:t>
+              <a:t>Quantinvo · dossier technique · septembre 2026</a:t>
             </a:r>
             <a:endParaRPr lang="en-US" sz="900" dirty="0"/>
           </a:p>
@@ -10997,7 +10997,7 @@
                 <a:ea typeface="Arial" pitchFamily="34" charset="-122"/>
                 <a:cs typeface="Arial" pitchFamily="34" charset="-120"/>
               </a:rPr>
-              <a:t>Quantinvo · dossier technique · août 2026</a:t>
+              <a:t>Quantinvo · dossier technique · septembre 2026</a:t>
             </a:r>
             <a:endParaRPr lang="en-US" sz="900" dirty="0"/>
           </a:p>
@@ -12158,7 +12158,7 @@
                 <a:ea typeface="Arial" pitchFamily="34" charset="-122"/>
                 <a:cs typeface="Arial" pitchFamily="34" charset="-120"/>
               </a:rPr>
-              <a:t>Quantinvo · dossier technique · août 2026</a:t>
+              <a:t>Quantinvo · dossier technique · septembre 2026</a:t>
             </a:r>
             <a:endParaRPr lang="en-US" sz="900" dirty="0"/>
           </a:p>
@@ -12983,7 +12983,7 @@
                 <a:ea typeface="Arial" pitchFamily="34" charset="-122"/>
                 <a:cs typeface="Arial" pitchFamily="34" charset="-120"/>
               </a:rPr>
-              <a:t>Quantinvo · dossier technique · août 2026</a:t>
+              <a:t>Quantinvo · dossier technique · septembre 2026</a:t>
             </a:r>
             <a:endParaRPr lang="en-US" sz="900" dirty="0"/>
           </a:p>
@@ -13897,7 +13897,7 @@
                 <a:ea typeface="Arial" pitchFamily="34" charset="-122"/>
                 <a:cs typeface="Arial" pitchFamily="34" charset="-120"/>
               </a:rPr>
-              <a:t>Quantinvo · dossier technique · août 2026</a:t>
+              <a:t>Quantinvo · dossier technique · septembre 2026</a:t>
             </a:r>
             <a:endParaRPr lang="en-US" sz="900" dirty="0"/>
           </a:p>
@@ -14417,7 +14417,7 @@
                 <a:ea typeface="Arial" pitchFamily="34" charset="-122"/>
                 <a:cs typeface="Arial" pitchFamily="34" charset="-120"/>
               </a:rPr>
-              <a:t>Quantinvo · dossier technique · août 2026</a:t>
+              <a:t>Quantinvo · dossier technique · septembre 2026</a:t>
             </a:r>
             <a:endParaRPr lang="en-US" sz="900" dirty="0"/>
           </a:p>

--- a/docs/entreprise/deck/Quantinvo-dossier-DSI.pptx
+++ b/docs/entreprise/deck/Quantinvo-dossier-DSI.pptx
@@ -2350,7 +2350,7 @@
             <a:r>
               <a:rPr lang="en-US" sz="2400" b="1" dirty="0">
                 <a:solidFill>
-                  <a:srgbClr val="0B0F19"/>
+                  <a:srgbClr val="14181A"/>
                 </a:solidFill>
                 <a:latin typeface="Arial" pitchFamily="34" charset="0"/>
                 <a:ea typeface="Arial" pitchFamily="34" charset="-122"/>
@@ -2371,17 +2371,17 @@
         <p:spPr>
           <a:xfrm>
             <a:off x="731520" y="1481328"/>
-            <a:ext cx="2377440" cy="25603"/>
+            <a:ext cx="2011680" cy="20117"/>
           </a:xfrm>
           <a:prstGeom prst="rect">
             <a:avLst/>
           </a:prstGeom>
           <a:solidFill>
-            <a:srgbClr val="38C9FF"/>
+            <a:srgbClr val="14181A"/>
           </a:solidFill>
           <a:ln w="12700">
             <a:solidFill>
-              <a:srgbClr val="38C9FF"/>
+              <a:srgbClr val="14181A"/>
             </a:solidFill>
             <a:prstDash val="solid"/>
           </a:ln>
@@ -2414,7 +2414,7 @@
             <a:r>
               <a:rPr lang="en-US" sz="1300" dirty="0">
                 <a:solidFill>
-                  <a:srgbClr val="5B6475"/>
+                  <a:srgbClr val="575F5C"/>
                 </a:solidFill>
                 <a:latin typeface="Arial" pitchFamily="34" charset="0"/>
                 <a:ea typeface="Arial" pitchFamily="34" charset="-122"/>
@@ -2456,7 +2456,7 @@
             <a:r>
               <a:rPr lang="en-US" sz="4000" b="1" dirty="0">
                 <a:solidFill>
-                  <a:srgbClr val="4636B0"/>
+                  <a:srgbClr val="14181A"/>
                 </a:solidFill>
                 <a:latin typeface="Arial" pitchFamily="34" charset="0"/>
                 <a:ea typeface="Arial" pitchFamily="34" charset="-122"/>
@@ -2498,7 +2498,7 @@
             <a:r>
               <a:rPr lang="en-US" sz="1500" dirty="0">
                 <a:solidFill>
-                  <a:srgbClr val="3D4556"/>
+                  <a:srgbClr val="3A423F"/>
                 </a:solidFill>
                 <a:latin typeface="Arial" pitchFamily="34" charset="0"/>
                 <a:ea typeface="Arial" pitchFamily="34" charset="-122"/>
@@ -2537,7 +2537,7 @@
             <a:r>
               <a:rPr lang="en-US" sz="1050" dirty="0">
                 <a:solidFill>
-                  <a:srgbClr val="5B6475"/>
+                  <a:srgbClr val="575F5C"/>
                 </a:solidFill>
                 <a:latin typeface="Arial" pitchFamily="34" charset="0"/>
                 <a:ea typeface="Arial" pitchFamily="34" charset="-122"/>
@@ -2632,7 +2632,7 @@
             <a:r>
               <a:rPr lang="en-US" sz="1600" b="1" dirty="0">
                 <a:solidFill>
-                  <a:srgbClr val="0B0F19"/>
+                  <a:srgbClr val="14181A"/>
                 </a:solidFill>
                 <a:latin typeface="Arial" pitchFamily="34" charset="0"/>
                 <a:ea typeface="Arial" pitchFamily="34" charset="-122"/>
@@ -2671,7 +2671,7 @@
             <a:r>
               <a:rPr lang="en-US" sz="1000" dirty="0">
                 <a:solidFill>
-                  <a:srgbClr val="5B6475"/>
+                  <a:srgbClr val="575F5C"/>
                 </a:solidFill>
                 <a:latin typeface="Arial" pitchFamily="34" charset="0"/>
                 <a:ea typeface="Arial" pitchFamily="34" charset="-122"/>
@@ -2692,17 +2692,17 @@
         <p:spPr>
           <a:xfrm>
             <a:off x="731520" y="877824"/>
-            <a:ext cx="10725912" cy="25603"/>
+            <a:ext cx="10725912" cy="10973"/>
           </a:xfrm>
           <a:prstGeom prst="rect">
             <a:avLst/>
           </a:prstGeom>
           <a:solidFill>
-            <a:srgbClr val="38C9FF"/>
+            <a:srgbClr val="E2E5E1"/>
           </a:solidFill>
           <a:ln w="12700">
             <a:solidFill>
-              <a:srgbClr val="38C9FF"/>
+              <a:srgbClr val="E2E5E1"/>
             </a:solidFill>
             <a:prstDash val="solid"/>
           </a:ln>
@@ -2738,7 +2738,7 @@
             <a:r>
               <a:rPr lang="en-US" sz="2500" b="1" dirty="0">
                 <a:solidFill>
-                  <a:srgbClr val="4636B0"/>
+                  <a:srgbClr val="14181A"/>
                 </a:solidFill>
                 <a:latin typeface="Arial" pitchFamily="34" charset="0"/>
                 <a:ea typeface="Arial" pitchFamily="34" charset="-122"/>
@@ -2780,7 +2780,7 @@
             <a:r>
               <a:rPr lang="en-US" sz="1350" b="1" dirty="0">
                 <a:solidFill>
-                  <a:srgbClr val="4636B0"/>
+                  <a:srgbClr val="14181A"/>
                 </a:solidFill>
                 <a:latin typeface="Arial" pitchFamily="34" charset="0"/>
                 <a:ea typeface="Arial" pitchFamily="34" charset="-122"/>
@@ -2822,7 +2822,7 @@
             <a:r>
               <a:rPr lang="en-US" sz="1100" dirty="0">
                 <a:solidFill>
-                  <a:srgbClr val="3D4556"/>
+                  <a:srgbClr val="3A423F"/>
                 </a:solidFill>
                 <a:latin typeface="Arial" pitchFamily="34" charset="0"/>
                 <a:ea typeface="Arial" pitchFamily="34" charset="-122"/>
@@ -2847,15 +2847,15 @@
           </a:xfrm>
           <a:prstGeom prst="roundRect">
             <a:avLst>
-              <a:gd name="adj" fmla="val 3857"/>
+              <a:gd name="adj" fmla="val 1102"/>
             </a:avLst>
           </a:prstGeom>
           <a:solidFill>
-            <a:srgbClr val="F4F5F9"/>
+            <a:srgbClr val="F2F3F1"/>
           </a:solidFill>
           <a:ln w="12700">
             <a:solidFill>
-              <a:srgbClr val="F4F5F9"/>
+              <a:srgbClr val="F2F3F1"/>
             </a:solidFill>
             <a:prstDash val="solid"/>
           </a:ln>
@@ -2915,7 +2915,7 @@
             <a:r>
               <a:rPr lang="en-US" sz="1350" b="1" dirty="0">
                 <a:solidFill>
-                  <a:srgbClr val="4636B0"/>
+                  <a:srgbClr val="14181A"/>
                 </a:solidFill>
                 <a:latin typeface="Arial" pitchFamily="34" charset="0"/>
                 <a:ea typeface="Arial" pitchFamily="34" charset="-122"/>
@@ -2957,7 +2957,7 @@
             <a:r>
               <a:rPr lang="en-US" sz="1100" dirty="0">
                 <a:solidFill>
-                  <a:srgbClr val="3D4556"/>
+                  <a:srgbClr val="3A423F"/>
                 </a:solidFill>
                 <a:latin typeface="Arial" pitchFamily="34" charset="0"/>
                 <a:ea typeface="Arial" pitchFamily="34" charset="-122"/>
@@ -2982,15 +2982,15 @@
           </a:xfrm>
           <a:prstGeom prst="roundRect">
             <a:avLst>
-              <a:gd name="adj" fmla="val 3857"/>
+              <a:gd name="adj" fmla="val 1102"/>
             </a:avLst>
           </a:prstGeom>
           <a:solidFill>
-            <a:srgbClr val="EEEEFC"/>
+            <a:srgbClr val="E7EDE9"/>
           </a:solidFill>
           <a:ln w="12700">
             <a:solidFill>
-              <a:srgbClr val="EEEEFC"/>
+              <a:srgbClr val="E7EDE9"/>
             </a:solidFill>
             <a:prstDash val="solid"/>
           </a:ln>
@@ -3050,7 +3050,7 @@
             <a:r>
               <a:rPr lang="en-US" sz="1350" b="1" dirty="0">
                 <a:solidFill>
-                  <a:srgbClr val="4636B0"/>
+                  <a:srgbClr val="14181A"/>
                 </a:solidFill>
                 <a:latin typeface="Arial" pitchFamily="34" charset="0"/>
                 <a:ea typeface="Arial" pitchFamily="34" charset="-122"/>
@@ -3092,7 +3092,7 @@
             <a:r>
               <a:rPr lang="en-US" sz="1100" dirty="0">
                 <a:solidFill>
-                  <a:srgbClr val="3D4556"/>
+                  <a:srgbClr val="3A423F"/>
                 </a:solidFill>
                 <a:latin typeface="Arial" pitchFamily="34" charset="0"/>
                 <a:ea typeface="Arial" pitchFamily="34" charset="-122"/>
@@ -3117,15 +3117,15 @@
           </a:xfrm>
           <a:prstGeom prst="roundRect">
             <a:avLst>
-              <a:gd name="adj" fmla="val 3857"/>
+              <a:gd name="adj" fmla="val 1102"/>
             </a:avLst>
           </a:prstGeom>
           <a:solidFill>
-            <a:srgbClr val="F4F5F9"/>
+            <a:srgbClr val="F2F3F1"/>
           </a:solidFill>
           <a:ln w="12700">
             <a:solidFill>
-              <a:srgbClr val="F4F5F9"/>
+              <a:srgbClr val="F2F3F1"/>
             </a:solidFill>
             <a:prstDash val="solid"/>
           </a:ln>
@@ -3182,7 +3182,7 @@
             <a:r>
               <a:rPr lang="en-US" sz="900" dirty="0">
                 <a:solidFill>
-                  <a:srgbClr val="5B6475"/>
+                  <a:srgbClr val="575F5C"/>
                 </a:solidFill>
                 <a:latin typeface="Arial" pitchFamily="34" charset="0"/>
                 <a:ea typeface="Arial" pitchFamily="34" charset="-122"/>
@@ -3221,7 +3221,7 @@
             <a:r>
               <a:rPr lang="en-US" sz="900" dirty="0">
                 <a:solidFill>
-                  <a:srgbClr val="5B6475"/>
+                  <a:srgbClr val="575F5C"/>
                 </a:solidFill>
                 <a:latin typeface="Arial" pitchFamily="34" charset="0"/>
                 <a:ea typeface="Arial" pitchFamily="34" charset="-122"/>
@@ -3316,7 +3316,7 @@
             <a:r>
               <a:rPr lang="en-US" sz="1600" b="1" dirty="0">
                 <a:solidFill>
-                  <a:srgbClr val="0B0F19"/>
+                  <a:srgbClr val="14181A"/>
                 </a:solidFill>
                 <a:latin typeface="Arial" pitchFamily="34" charset="0"/>
                 <a:ea typeface="Arial" pitchFamily="34" charset="-122"/>
@@ -3355,7 +3355,7 @@
             <a:r>
               <a:rPr lang="en-US" sz="1000" dirty="0">
                 <a:solidFill>
-                  <a:srgbClr val="5B6475"/>
+                  <a:srgbClr val="575F5C"/>
                 </a:solidFill>
                 <a:latin typeface="Arial" pitchFamily="34" charset="0"/>
                 <a:ea typeface="Arial" pitchFamily="34" charset="-122"/>
@@ -3376,17 +3376,17 @@
         <p:spPr>
           <a:xfrm>
             <a:off x="731520" y="877824"/>
-            <a:ext cx="10725912" cy="25603"/>
+            <a:ext cx="10725912" cy="10973"/>
           </a:xfrm>
           <a:prstGeom prst="rect">
             <a:avLst/>
           </a:prstGeom>
           <a:solidFill>
-            <a:srgbClr val="38C9FF"/>
+            <a:srgbClr val="E2E5E1"/>
           </a:solidFill>
           <a:ln w="12700">
             <a:solidFill>
-              <a:srgbClr val="38C9FF"/>
+              <a:srgbClr val="E2E5E1"/>
             </a:solidFill>
             <a:prstDash val="solid"/>
           </a:ln>
@@ -3422,7 +3422,7 @@
             <a:r>
               <a:rPr lang="en-US" sz="2600" b="1" dirty="0">
                 <a:solidFill>
-                  <a:srgbClr val="4636B0"/>
+                  <a:srgbClr val="14181A"/>
                 </a:solidFill>
                 <a:latin typeface="Arial" pitchFamily="34" charset="0"/>
                 <a:ea typeface="Arial" pitchFamily="34" charset="-122"/>
@@ -3464,7 +3464,7 @@
             <a:r>
               <a:rPr lang="en-US" sz="1200" dirty="0">
                 <a:solidFill>
-                  <a:srgbClr val="3D4556"/>
+                  <a:srgbClr val="3A423F"/>
                 </a:solidFill>
                 <a:latin typeface="Arial" pitchFamily="34" charset="0"/>
                 <a:ea typeface="Arial" pitchFamily="34" charset="-122"/>
@@ -3503,7 +3503,7 @@
             <a:r>
               <a:rPr lang="en-US" sz="1000" b="1" dirty="0">
                 <a:solidFill>
-                  <a:srgbClr val="5B6475"/>
+                  <a:srgbClr val="575F5C"/>
                 </a:solidFill>
                 <a:latin typeface="Arial" pitchFamily="34" charset="0"/>
                 <a:ea typeface="Arial" pitchFamily="34" charset="-122"/>
@@ -3542,7 +3542,7 @@
             <a:r>
               <a:rPr lang="en-US" sz="1000" b="1" dirty="0">
                 <a:solidFill>
-                  <a:srgbClr val="5B6475"/>
+                  <a:srgbClr val="575F5C"/>
                 </a:solidFill>
                 <a:latin typeface="Arial" pitchFamily="34" charset="0"/>
                 <a:ea typeface="Arial" pitchFamily="34" charset="-122"/>
@@ -3571,7 +3571,7 @@
           <a:noFill/>
           <a:ln w="9525">
             <a:solidFill>
-              <a:srgbClr val="E3E6EE"/>
+              <a:srgbClr val="E2E5E1"/>
             </a:solidFill>
             <a:prstDash val="solid"/>
           </a:ln>
@@ -3607,7 +3607,7 @@
             <a:r>
               <a:rPr lang="en-US" sz="1150" b="1" dirty="0">
                 <a:solidFill>
-                  <a:srgbClr val="0B0F19"/>
+                  <a:srgbClr val="14181A"/>
                 </a:solidFill>
                 <a:latin typeface="Arial" pitchFamily="34" charset="0"/>
                 <a:ea typeface="Arial" pitchFamily="34" charset="-122"/>
@@ -3649,7 +3649,7 @@
             <a:r>
               <a:rPr lang="en-US" sz="1150" dirty="0">
                 <a:solidFill>
-                  <a:srgbClr val="3D4556"/>
+                  <a:srgbClr val="3A423F"/>
                 </a:solidFill>
                 <a:latin typeface="Arial" pitchFamily="34" charset="0"/>
                 <a:ea typeface="Arial" pitchFamily="34" charset="-122"/>
@@ -3678,7 +3678,7 @@
           <a:noFill/>
           <a:ln w="9525">
             <a:solidFill>
-              <a:srgbClr val="E3E6EE"/>
+              <a:srgbClr val="E2E5E1"/>
             </a:solidFill>
             <a:prstDash val="solid"/>
           </a:ln>
@@ -3714,7 +3714,7 @@
             <a:r>
               <a:rPr lang="en-US" sz="1150" b="1" dirty="0">
                 <a:solidFill>
-                  <a:srgbClr val="0B0F19"/>
+                  <a:srgbClr val="14181A"/>
                 </a:solidFill>
                 <a:latin typeface="Arial" pitchFamily="34" charset="0"/>
                 <a:ea typeface="Arial" pitchFamily="34" charset="-122"/>
@@ -3756,7 +3756,7 @@
             <a:r>
               <a:rPr lang="en-US" sz="1150" dirty="0">
                 <a:solidFill>
-                  <a:srgbClr val="3D4556"/>
+                  <a:srgbClr val="3A423F"/>
                 </a:solidFill>
                 <a:latin typeface="Arial" pitchFamily="34" charset="0"/>
                 <a:ea typeface="Arial" pitchFamily="34" charset="-122"/>
@@ -3785,7 +3785,7 @@
           <a:noFill/>
           <a:ln w="9525">
             <a:solidFill>
-              <a:srgbClr val="E3E6EE"/>
+              <a:srgbClr val="E2E5E1"/>
             </a:solidFill>
             <a:prstDash val="solid"/>
           </a:ln>
@@ -3821,7 +3821,7 @@
             <a:r>
               <a:rPr lang="en-US" sz="1150" b="1" dirty="0">
                 <a:solidFill>
-                  <a:srgbClr val="0B0F19"/>
+                  <a:srgbClr val="14181A"/>
                 </a:solidFill>
                 <a:latin typeface="Arial" pitchFamily="34" charset="0"/>
                 <a:ea typeface="Arial" pitchFamily="34" charset="-122"/>
@@ -3863,7 +3863,7 @@
             <a:r>
               <a:rPr lang="en-US" sz="1150" dirty="0">
                 <a:solidFill>
-                  <a:srgbClr val="3D4556"/>
+                  <a:srgbClr val="3A423F"/>
                 </a:solidFill>
                 <a:latin typeface="Arial" pitchFamily="34" charset="0"/>
                 <a:ea typeface="Arial" pitchFamily="34" charset="-122"/>
@@ -3892,7 +3892,7 @@
           <a:noFill/>
           <a:ln w="9525">
             <a:solidFill>
-              <a:srgbClr val="E3E6EE"/>
+              <a:srgbClr val="E2E5E1"/>
             </a:solidFill>
             <a:prstDash val="solid"/>
           </a:ln>
@@ -3931,7 +3931,7 @@
             <a:r>
               <a:rPr lang="en-US" sz="1150" b="1" dirty="0">
                 <a:solidFill>
-                  <a:srgbClr val="0B0F19"/>
+                  <a:srgbClr val="14181A"/>
                 </a:solidFill>
                 <a:latin typeface="Arial" pitchFamily="34" charset="0"/>
                 <a:ea typeface="Arial" pitchFamily="34" charset="-122"/>
@@ -3951,7 +3951,7 @@
             <a:r>
               <a:rPr lang="en-US" sz="1150" dirty="0">
                 <a:solidFill>
-                  <a:srgbClr val="3D4556"/>
+                  <a:srgbClr val="3A423F"/>
                 </a:solidFill>
                 <a:latin typeface="Arial" pitchFamily="34" charset="0"/>
                 <a:ea typeface="Arial" pitchFamily="34" charset="-122"/>
@@ -3974,7 +3974,7 @@
             <a:r>
               <a:rPr lang="en-US" sz="1150" b="1" dirty="0">
                 <a:solidFill>
-                  <a:srgbClr val="0B0F19"/>
+                  <a:srgbClr val="14181A"/>
                 </a:solidFill>
                 <a:latin typeface="Arial" pitchFamily="34" charset="0"/>
                 <a:ea typeface="Arial" pitchFamily="34" charset="-122"/>
@@ -3994,7 +3994,7 @@
             <a:r>
               <a:rPr lang="en-US" sz="1150" dirty="0">
                 <a:solidFill>
-                  <a:srgbClr val="3D4556"/>
+                  <a:srgbClr val="3A423F"/>
                 </a:solidFill>
                 <a:latin typeface="Arial" pitchFamily="34" charset="0"/>
                 <a:ea typeface="Arial" pitchFamily="34" charset="-122"/>
@@ -4017,7 +4017,7 @@
             <a:r>
               <a:rPr lang="en-US" sz="1150" b="1" dirty="0">
                 <a:solidFill>
-                  <a:srgbClr val="0B0F19"/>
+                  <a:srgbClr val="14181A"/>
                 </a:solidFill>
                 <a:latin typeface="Arial" pitchFamily="34" charset="0"/>
                 <a:ea typeface="Arial" pitchFamily="34" charset="-122"/>
@@ -4037,7 +4037,7 @@
             <a:r>
               <a:rPr lang="en-US" sz="1150" dirty="0">
                 <a:solidFill>
-                  <a:srgbClr val="3D4556"/>
+                  <a:srgbClr val="3A423F"/>
                 </a:solidFill>
                 <a:latin typeface="Arial" pitchFamily="34" charset="0"/>
                 <a:ea typeface="Arial" pitchFamily="34" charset="-122"/>
@@ -4060,7 +4060,7 @@
             <a:r>
               <a:rPr lang="en-US" sz="1150" b="1" dirty="0">
                 <a:solidFill>
-                  <a:srgbClr val="0B0F19"/>
+                  <a:srgbClr val="14181A"/>
                 </a:solidFill>
                 <a:latin typeface="Arial" pitchFamily="34" charset="0"/>
                 <a:ea typeface="Arial" pitchFamily="34" charset="-122"/>
@@ -4080,7 +4080,7 @@
             <a:r>
               <a:rPr lang="en-US" sz="1150" dirty="0">
                 <a:solidFill>
-                  <a:srgbClr val="3D4556"/>
+                  <a:srgbClr val="3A423F"/>
                 </a:solidFill>
                 <a:latin typeface="Arial" pitchFamily="34" charset="0"/>
                 <a:ea typeface="Arial" pitchFamily="34" charset="-122"/>
@@ -4119,7 +4119,7 @@
             <a:r>
               <a:rPr lang="en-US" sz="900" dirty="0">
                 <a:solidFill>
-                  <a:srgbClr val="5B6475"/>
+                  <a:srgbClr val="575F5C"/>
                 </a:solidFill>
                 <a:latin typeface="Arial" pitchFamily="34" charset="0"/>
                 <a:ea typeface="Arial" pitchFamily="34" charset="-122"/>
@@ -4158,7 +4158,7 @@
             <a:r>
               <a:rPr lang="en-US" sz="900" dirty="0">
                 <a:solidFill>
-                  <a:srgbClr val="5B6475"/>
+                  <a:srgbClr val="575F5C"/>
                 </a:solidFill>
                 <a:latin typeface="Arial" pitchFamily="34" charset="0"/>
                 <a:ea typeface="Arial" pitchFamily="34" charset="-122"/>
@@ -4253,7 +4253,7 @@
             <a:r>
               <a:rPr lang="en-US" sz="1600" b="1" dirty="0">
                 <a:solidFill>
-                  <a:srgbClr val="0B0F19"/>
+                  <a:srgbClr val="14181A"/>
                 </a:solidFill>
                 <a:latin typeface="Arial" pitchFamily="34" charset="0"/>
                 <a:ea typeface="Arial" pitchFamily="34" charset="-122"/>
@@ -4292,7 +4292,7 @@
             <a:r>
               <a:rPr lang="en-US" sz="1000" dirty="0">
                 <a:solidFill>
-                  <a:srgbClr val="5B6475"/>
+                  <a:srgbClr val="575F5C"/>
                 </a:solidFill>
                 <a:latin typeface="Arial" pitchFamily="34" charset="0"/>
                 <a:ea typeface="Arial" pitchFamily="34" charset="-122"/>
@@ -4313,17 +4313,17 @@
         <p:spPr>
           <a:xfrm>
             <a:off x="731520" y="877824"/>
-            <a:ext cx="10725912" cy="25603"/>
+            <a:ext cx="10725912" cy="10973"/>
           </a:xfrm>
           <a:prstGeom prst="rect">
             <a:avLst/>
           </a:prstGeom>
           <a:solidFill>
-            <a:srgbClr val="38C9FF"/>
+            <a:srgbClr val="E2E5E1"/>
           </a:solidFill>
           <a:ln w="12700">
             <a:solidFill>
-              <a:srgbClr val="38C9FF"/>
+              <a:srgbClr val="E2E5E1"/>
             </a:solidFill>
             <a:prstDash val="solid"/>
           </a:ln>
@@ -4359,7 +4359,7 @@
             <a:r>
               <a:rPr lang="en-US" sz="2600" b="1" dirty="0">
                 <a:solidFill>
-                  <a:srgbClr val="4636B0"/>
+                  <a:srgbClr val="14181A"/>
                 </a:solidFill>
                 <a:latin typeface="Arial" pitchFamily="34" charset="0"/>
                 <a:ea typeface="Arial" pitchFamily="34" charset="-122"/>
@@ -4401,7 +4401,7 @@
             <a:r>
               <a:rPr lang="en-US" sz="1200" i="1" dirty="0">
                 <a:solidFill>
-                  <a:srgbClr val="5B6475"/>
+                  <a:srgbClr val="575F5C"/>
                 </a:solidFill>
                 <a:latin typeface="Arial" pitchFamily="34" charset="0"/>
                 <a:ea typeface="Arial" pitchFamily="34" charset="-122"/>
@@ -4446,7 +4446,7 @@
             <a:r>
               <a:rPr lang="en-US" sz="1200" b="1" dirty="0">
                 <a:solidFill>
-                  <a:srgbClr val="0B0F19"/>
+                  <a:srgbClr val="14181A"/>
                 </a:solidFill>
                 <a:latin typeface="Arial" pitchFamily="34" charset="0"/>
                 <a:ea typeface="Arial" pitchFamily="34" charset="-122"/>
@@ -4466,7 +4466,7 @@
             <a:r>
               <a:rPr lang="en-US" sz="1200" dirty="0">
                 <a:solidFill>
-                  <a:srgbClr val="3D4556"/>
+                  <a:srgbClr val="3A423F"/>
                 </a:solidFill>
                 <a:latin typeface="Arial" pitchFamily="34" charset="0"/>
                 <a:ea typeface="Arial" pitchFamily="34" charset="-122"/>
@@ -4489,7 +4489,7 @@
             <a:r>
               <a:rPr lang="en-US" sz="1200" b="1" dirty="0">
                 <a:solidFill>
-                  <a:srgbClr val="0B0F19"/>
+                  <a:srgbClr val="14181A"/>
                 </a:solidFill>
                 <a:latin typeface="Arial" pitchFamily="34" charset="0"/>
                 <a:ea typeface="Arial" pitchFamily="34" charset="-122"/>
@@ -4509,7 +4509,7 @@
             <a:r>
               <a:rPr lang="en-US" sz="1200" dirty="0">
                 <a:solidFill>
-                  <a:srgbClr val="3D4556"/>
+                  <a:srgbClr val="3A423F"/>
                 </a:solidFill>
                 <a:latin typeface="Arial" pitchFamily="34" charset="0"/>
                 <a:ea typeface="Arial" pitchFamily="34" charset="-122"/>
@@ -4532,7 +4532,7 @@
             <a:r>
               <a:rPr lang="en-US" sz="1200" b="1" dirty="0">
                 <a:solidFill>
-                  <a:srgbClr val="0B0F19"/>
+                  <a:srgbClr val="14181A"/>
                 </a:solidFill>
                 <a:latin typeface="Arial" pitchFamily="34" charset="0"/>
                 <a:ea typeface="Arial" pitchFamily="34" charset="-122"/>
@@ -4552,7 +4552,7 @@
             <a:r>
               <a:rPr lang="en-US" sz="1200" dirty="0">
                 <a:solidFill>
-                  <a:srgbClr val="3D4556"/>
+                  <a:srgbClr val="3A423F"/>
                 </a:solidFill>
                 <a:latin typeface="Arial" pitchFamily="34" charset="0"/>
                 <a:ea typeface="Arial" pitchFamily="34" charset="-122"/>
@@ -4575,7 +4575,7 @@
             <a:r>
               <a:rPr lang="en-US" sz="1200" b="1" dirty="0">
                 <a:solidFill>
-                  <a:srgbClr val="0B0F19"/>
+                  <a:srgbClr val="14181A"/>
                 </a:solidFill>
                 <a:latin typeface="Arial" pitchFamily="34" charset="0"/>
                 <a:ea typeface="Arial" pitchFamily="34" charset="-122"/>
@@ -4595,7 +4595,7 @@
             <a:r>
               <a:rPr lang="en-US" sz="1200" dirty="0">
                 <a:solidFill>
-                  <a:srgbClr val="3D4556"/>
+                  <a:srgbClr val="3A423F"/>
                 </a:solidFill>
                 <a:latin typeface="Arial" pitchFamily="34" charset="0"/>
                 <a:ea typeface="Arial" pitchFamily="34" charset="-122"/>
@@ -4618,7 +4618,7 @@
             <a:r>
               <a:rPr lang="en-US" sz="1200" b="1" dirty="0">
                 <a:solidFill>
-                  <a:srgbClr val="0B0F19"/>
+                  <a:srgbClr val="14181A"/>
                 </a:solidFill>
                 <a:latin typeface="Arial" pitchFamily="34" charset="0"/>
                 <a:ea typeface="Arial" pitchFamily="34" charset="-122"/>
@@ -4638,7 +4638,7 @@
             <a:r>
               <a:rPr lang="en-US" sz="1200" dirty="0">
                 <a:solidFill>
-                  <a:srgbClr val="3D4556"/>
+                  <a:srgbClr val="3A423F"/>
                 </a:solidFill>
                 <a:latin typeface="Arial" pitchFamily="34" charset="0"/>
                 <a:ea typeface="Arial" pitchFamily="34" charset="-122"/>
@@ -4661,7 +4661,7 @@
             <a:r>
               <a:rPr lang="en-US" sz="1200" b="1" dirty="0">
                 <a:solidFill>
-                  <a:srgbClr val="0B0F19"/>
+                  <a:srgbClr val="14181A"/>
                 </a:solidFill>
                 <a:latin typeface="Arial" pitchFamily="34" charset="0"/>
                 <a:ea typeface="Arial" pitchFamily="34" charset="-122"/>
@@ -4681,7 +4681,7 @@
             <a:r>
               <a:rPr lang="en-US" sz="1200" dirty="0">
                 <a:solidFill>
-                  <a:srgbClr val="3D4556"/>
+                  <a:srgbClr val="3A423F"/>
                 </a:solidFill>
                 <a:latin typeface="Arial" pitchFamily="34" charset="0"/>
                 <a:ea typeface="Arial" pitchFamily="34" charset="-122"/>
@@ -4720,7 +4720,7 @@
             <a:r>
               <a:rPr lang="en-US" sz="900" dirty="0">
                 <a:solidFill>
-                  <a:srgbClr val="5B6475"/>
+                  <a:srgbClr val="575F5C"/>
                 </a:solidFill>
                 <a:latin typeface="Arial" pitchFamily="34" charset="0"/>
                 <a:ea typeface="Arial" pitchFamily="34" charset="-122"/>
@@ -4759,7 +4759,7 @@
             <a:r>
               <a:rPr lang="en-US" sz="900" dirty="0">
                 <a:solidFill>
-                  <a:srgbClr val="5B6475"/>
+                  <a:srgbClr val="575F5C"/>
                 </a:solidFill>
                 <a:latin typeface="Arial" pitchFamily="34" charset="0"/>
                 <a:ea typeface="Arial" pitchFamily="34" charset="-122"/>
@@ -4854,7 +4854,7 @@
             <a:r>
               <a:rPr lang="en-US" sz="1600" b="1" dirty="0">
                 <a:solidFill>
-                  <a:srgbClr val="0B0F19"/>
+                  <a:srgbClr val="14181A"/>
                 </a:solidFill>
                 <a:latin typeface="Arial" pitchFamily="34" charset="0"/>
                 <a:ea typeface="Arial" pitchFamily="34" charset="-122"/>
@@ -4893,7 +4893,7 @@
             <a:r>
               <a:rPr lang="en-US" sz="1000" dirty="0">
                 <a:solidFill>
-                  <a:srgbClr val="5B6475"/>
+                  <a:srgbClr val="575F5C"/>
                 </a:solidFill>
                 <a:latin typeface="Arial" pitchFamily="34" charset="0"/>
                 <a:ea typeface="Arial" pitchFamily="34" charset="-122"/>
@@ -4914,17 +4914,17 @@
         <p:spPr>
           <a:xfrm>
             <a:off x="731520" y="877824"/>
-            <a:ext cx="10725912" cy="25603"/>
+            <a:ext cx="10725912" cy="10973"/>
           </a:xfrm>
           <a:prstGeom prst="rect">
             <a:avLst/>
           </a:prstGeom>
           <a:solidFill>
-            <a:srgbClr val="38C9FF"/>
+            <a:srgbClr val="E2E5E1"/>
           </a:solidFill>
           <a:ln w="12700">
             <a:solidFill>
-              <a:srgbClr val="38C9FF"/>
+              <a:srgbClr val="E2E5E1"/>
             </a:solidFill>
             <a:prstDash val="solid"/>
           </a:ln>
@@ -4960,7 +4960,7 @@
             <a:r>
               <a:rPr lang="en-US" sz="2600" b="1" dirty="0">
                 <a:solidFill>
-                  <a:srgbClr val="4636B0"/>
+                  <a:srgbClr val="14181A"/>
                 </a:solidFill>
                 <a:latin typeface="Arial" pitchFamily="34" charset="0"/>
                 <a:ea typeface="Arial" pitchFamily="34" charset="-122"/>
@@ -4999,7 +4999,7 @@
             <a:r>
               <a:rPr lang="en-US" sz="4600" b="1" dirty="0">
                 <a:solidFill>
-                  <a:srgbClr val="4636B0"/>
+                  <a:srgbClr val="1E4D3B"/>
                 </a:solidFill>
                 <a:latin typeface="Arial" pitchFamily="34" charset="0"/>
                 <a:ea typeface="Arial" pitchFamily="34" charset="-122"/>
@@ -5041,7 +5041,7 @@
             <a:r>
               <a:rPr lang="en-US" sz="1200" dirty="0">
                 <a:solidFill>
-                  <a:srgbClr val="5B6475"/>
+                  <a:srgbClr val="575F5C"/>
                 </a:solidFill>
                 <a:latin typeface="Arial" pitchFamily="34" charset="0"/>
                 <a:ea typeface="Arial" pitchFamily="34" charset="-122"/>
@@ -5086,7 +5086,7 @@
             <a:r>
               <a:rPr lang="en-US" sz="1200" b="1" dirty="0">
                 <a:solidFill>
-                  <a:srgbClr val="0B0F19"/>
+                  <a:srgbClr val="14181A"/>
                 </a:solidFill>
                 <a:latin typeface="Arial" pitchFamily="34" charset="0"/>
                 <a:ea typeface="Arial" pitchFamily="34" charset="-122"/>
@@ -5106,7 +5106,7 @@
             <a:r>
               <a:rPr lang="en-US" sz="1200" dirty="0">
                 <a:solidFill>
-                  <a:srgbClr val="3D4556"/>
+                  <a:srgbClr val="3A423F"/>
                 </a:solidFill>
                 <a:latin typeface="Arial" pitchFamily="34" charset="0"/>
                 <a:ea typeface="Arial" pitchFamily="34" charset="-122"/>
@@ -5129,7 +5129,7 @@
             <a:r>
               <a:rPr lang="en-US" sz="1200" b="1" dirty="0">
                 <a:solidFill>
-                  <a:srgbClr val="0B0F19"/>
+                  <a:srgbClr val="14181A"/>
                 </a:solidFill>
                 <a:latin typeface="Arial" pitchFamily="34" charset="0"/>
                 <a:ea typeface="Arial" pitchFamily="34" charset="-122"/>
@@ -5149,7 +5149,7 @@
             <a:r>
               <a:rPr lang="en-US" sz="1200" dirty="0">
                 <a:solidFill>
-                  <a:srgbClr val="3D4556"/>
+                  <a:srgbClr val="3A423F"/>
                 </a:solidFill>
                 <a:latin typeface="Arial" pitchFamily="34" charset="0"/>
                 <a:ea typeface="Arial" pitchFamily="34" charset="-122"/>
@@ -5172,7 +5172,7 @@
             <a:r>
               <a:rPr lang="en-US" sz="1200" b="1" dirty="0">
                 <a:solidFill>
-                  <a:srgbClr val="0B0F19"/>
+                  <a:srgbClr val="14181A"/>
                 </a:solidFill>
                 <a:latin typeface="Arial" pitchFamily="34" charset="0"/>
                 <a:ea typeface="Arial" pitchFamily="34" charset="-122"/>
@@ -5192,7 +5192,7 @@
             <a:r>
               <a:rPr lang="en-US" sz="1200" dirty="0">
                 <a:solidFill>
-                  <a:srgbClr val="3D4556"/>
+                  <a:srgbClr val="3A423F"/>
                 </a:solidFill>
                 <a:latin typeface="Arial" pitchFamily="34" charset="0"/>
                 <a:ea typeface="Arial" pitchFamily="34" charset="-122"/>
@@ -5215,7 +5215,7 @@
             <a:r>
               <a:rPr lang="en-US" sz="1200" b="1" dirty="0">
                 <a:solidFill>
-                  <a:srgbClr val="0B0F19"/>
+                  <a:srgbClr val="14181A"/>
                 </a:solidFill>
                 <a:latin typeface="Arial" pitchFamily="34" charset="0"/>
                 <a:ea typeface="Arial" pitchFamily="34" charset="-122"/>
@@ -5235,7 +5235,7 @@
             <a:r>
               <a:rPr lang="en-US" sz="1200" dirty="0">
                 <a:solidFill>
-                  <a:srgbClr val="3D4556"/>
+                  <a:srgbClr val="3A423F"/>
                 </a:solidFill>
                 <a:latin typeface="Arial" pitchFamily="34" charset="0"/>
                 <a:ea typeface="Arial" pitchFamily="34" charset="-122"/>
@@ -5274,7 +5274,7 @@
             <a:r>
               <a:rPr lang="en-US" sz="900" dirty="0">
                 <a:solidFill>
-                  <a:srgbClr val="5B6475"/>
+                  <a:srgbClr val="575F5C"/>
                 </a:solidFill>
                 <a:latin typeface="Arial" pitchFamily="34" charset="0"/>
                 <a:ea typeface="Arial" pitchFamily="34" charset="-122"/>
@@ -5313,7 +5313,7 @@
             <a:r>
               <a:rPr lang="en-US" sz="900" dirty="0">
                 <a:solidFill>
-                  <a:srgbClr val="5B6475"/>
+                  <a:srgbClr val="575F5C"/>
                 </a:solidFill>
                 <a:latin typeface="Arial" pitchFamily="34" charset="0"/>
                 <a:ea typeface="Arial" pitchFamily="34" charset="-122"/>
@@ -5408,7 +5408,7 @@
             <a:r>
               <a:rPr lang="en-US" sz="1600" b="1" dirty="0">
                 <a:solidFill>
-                  <a:srgbClr val="0B0F19"/>
+                  <a:srgbClr val="14181A"/>
                 </a:solidFill>
                 <a:latin typeface="Arial" pitchFamily="34" charset="0"/>
                 <a:ea typeface="Arial" pitchFamily="34" charset="-122"/>
@@ -5447,7 +5447,7 @@
             <a:r>
               <a:rPr lang="en-US" sz="1000" dirty="0">
                 <a:solidFill>
-                  <a:srgbClr val="5B6475"/>
+                  <a:srgbClr val="575F5C"/>
                 </a:solidFill>
                 <a:latin typeface="Arial" pitchFamily="34" charset="0"/>
                 <a:ea typeface="Arial" pitchFamily="34" charset="-122"/>
@@ -5468,17 +5468,17 @@
         <p:spPr>
           <a:xfrm>
             <a:off x="731520" y="877824"/>
-            <a:ext cx="10725912" cy="25603"/>
+            <a:ext cx="10725912" cy="10973"/>
           </a:xfrm>
           <a:prstGeom prst="rect">
             <a:avLst/>
           </a:prstGeom>
           <a:solidFill>
-            <a:srgbClr val="38C9FF"/>
+            <a:srgbClr val="E2E5E1"/>
           </a:solidFill>
           <a:ln w="12700">
             <a:solidFill>
-              <a:srgbClr val="38C9FF"/>
+              <a:srgbClr val="E2E5E1"/>
             </a:solidFill>
             <a:prstDash val="solid"/>
           </a:ln>
@@ -5514,7 +5514,7 @@
             <a:r>
               <a:rPr lang="en-US" sz="2600" b="1" dirty="0">
                 <a:solidFill>
-                  <a:srgbClr val="4636B0"/>
+                  <a:srgbClr val="14181A"/>
                 </a:solidFill>
                 <a:latin typeface="Arial" pitchFamily="34" charset="0"/>
                 <a:ea typeface="Arial" pitchFamily="34" charset="-122"/>
@@ -5556,7 +5556,7 @@
             <a:r>
               <a:rPr lang="en-US" sz="1200" i="1" dirty="0">
                 <a:solidFill>
-                  <a:srgbClr val="5B6475"/>
+                  <a:srgbClr val="575F5C"/>
                 </a:solidFill>
                 <a:latin typeface="Arial" pitchFamily="34" charset="0"/>
                 <a:ea typeface="Arial" pitchFamily="34" charset="-122"/>
@@ -5601,7 +5601,7 @@
             <a:r>
               <a:rPr lang="en-US" sz="1200" b="1" dirty="0">
                 <a:solidFill>
-                  <a:srgbClr val="0B0F19"/>
+                  <a:srgbClr val="14181A"/>
                 </a:solidFill>
                 <a:latin typeface="Arial" pitchFamily="34" charset="0"/>
                 <a:ea typeface="Arial" pitchFamily="34" charset="-122"/>
@@ -5621,7 +5621,7 @@
             <a:r>
               <a:rPr lang="en-US" sz="1200" dirty="0">
                 <a:solidFill>
-                  <a:srgbClr val="3D4556"/>
+                  <a:srgbClr val="3A423F"/>
                 </a:solidFill>
                 <a:latin typeface="Arial" pitchFamily="34" charset="0"/>
                 <a:ea typeface="Arial" pitchFamily="34" charset="-122"/>
@@ -5644,7 +5644,7 @@
             <a:r>
               <a:rPr lang="en-US" sz="1200" b="1" dirty="0">
                 <a:solidFill>
-                  <a:srgbClr val="0B0F19"/>
+                  <a:srgbClr val="14181A"/>
                 </a:solidFill>
                 <a:latin typeface="Arial" pitchFamily="34" charset="0"/>
                 <a:ea typeface="Arial" pitchFamily="34" charset="-122"/>
@@ -5664,7 +5664,7 @@
             <a:r>
               <a:rPr lang="en-US" sz="1200" dirty="0">
                 <a:solidFill>
-                  <a:srgbClr val="3D4556"/>
+                  <a:srgbClr val="3A423F"/>
                 </a:solidFill>
                 <a:latin typeface="Arial" pitchFamily="34" charset="0"/>
                 <a:ea typeface="Arial" pitchFamily="34" charset="-122"/>
@@ -5687,7 +5687,7 @@
             <a:r>
               <a:rPr lang="en-US" sz="1200" b="1" dirty="0">
                 <a:solidFill>
-                  <a:srgbClr val="0B0F19"/>
+                  <a:srgbClr val="14181A"/>
                 </a:solidFill>
                 <a:latin typeface="Arial" pitchFamily="34" charset="0"/>
                 <a:ea typeface="Arial" pitchFamily="34" charset="-122"/>
@@ -5707,7 +5707,7 @@
             <a:r>
               <a:rPr lang="en-US" sz="1200" dirty="0">
                 <a:solidFill>
-                  <a:srgbClr val="3D4556"/>
+                  <a:srgbClr val="3A423F"/>
                 </a:solidFill>
                 <a:latin typeface="Arial" pitchFamily="34" charset="0"/>
                 <a:ea typeface="Arial" pitchFamily="34" charset="-122"/>
@@ -5730,7 +5730,7 @@
             <a:r>
               <a:rPr lang="en-US" sz="1200" b="1" dirty="0">
                 <a:solidFill>
-                  <a:srgbClr val="0B0F19"/>
+                  <a:srgbClr val="14181A"/>
                 </a:solidFill>
                 <a:latin typeface="Arial" pitchFamily="34" charset="0"/>
                 <a:ea typeface="Arial" pitchFamily="34" charset="-122"/>
@@ -5750,7 +5750,7 @@
             <a:r>
               <a:rPr lang="en-US" sz="1200" dirty="0">
                 <a:solidFill>
-                  <a:srgbClr val="3D4556"/>
+                  <a:srgbClr val="3A423F"/>
                 </a:solidFill>
                 <a:latin typeface="Arial" pitchFamily="34" charset="0"/>
                 <a:ea typeface="Arial" pitchFamily="34" charset="-122"/>
@@ -5789,7 +5789,7 @@
             <a:r>
               <a:rPr lang="en-US" sz="900" dirty="0">
                 <a:solidFill>
-                  <a:srgbClr val="5B6475"/>
+                  <a:srgbClr val="575F5C"/>
                 </a:solidFill>
                 <a:latin typeface="Arial" pitchFamily="34" charset="0"/>
                 <a:ea typeface="Arial" pitchFamily="34" charset="-122"/>
@@ -5828,7 +5828,7 @@
             <a:r>
               <a:rPr lang="en-US" sz="900" dirty="0">
                 <a:solidFill>
-                  <a:srgbClr val="5B6475"/>
+                  <a:srgbClr val="575F5C"/>
                 </a:solidFill>
                 <a:latin typeface="Arial" pitchFamily="34" charset="0"/>
                 <a:ea typeface="Arial" pitchFamily="34" charset="-122"/>
@@ -5923,7 +5923,7 @@
             <a:r>
               <a:rPr lang="en-US" sz="1600" b="1" dirty="0">
                 <a:solidFill>
-                  <a:srgbClr val="0B0F19"/>
+                  <a:srgbClr val="14181A"/>
                 </a:solidFill>
                 <a:latin typeface="Arial" pitchFamily="34" charset="0"/>
                 <a:ea typeface="Arial" pitchFamily="34" charset="-122"/>
@@ -5962,7 +5962,7 @@
             <a:r>
               <a:rPr lang="en-US" sz="1000" dirty="0">
                 <a:solidFill>
-                  <a:srgbClr val="5B6475"/>
+                  <a:srgbClr val="575F5C"/>
                 </a:solidFill>
                 <a:latin typeface="Arial" pitchFamily="34" charset="0"/>
                 <a:ea typeface="Arial" pitchFamily="34" charset="-122"/>
@@ -5983,17 +5983,17 @@
         <p:spPr>
           <a:xfrm>
             <a:off x="731520" y="877824"/>
-            <a:ext cx="10725912" cy="25603"/>
+            <a:ext cx="10725912" cy="10973"/>
           </a:xfrm>
           <a:prstGeom prst="rect">
             <a:avLst/>
           </a:prstGeom>
           <a:solidFill>
-            <a:srgbClr val="38C9FF"/>
+            <a:srgbClr val="E2E5E1"/>
           </a:solidFill>
           <a:ln w="12700">
             <a:solidFill>
-              <a:srgbClr val="38C9FF"/>
+              <a:srgbClr val="E2E5E1"/>
             </a:solidFill>
             <a:prstDash val="solid"/>
           </a:ln>
@@ -6029,7 +6029,7 @@
             <a:r>
               <a:rPr lang="en-US" sz="2600" b="1" dirty="0">
                 <a:solidFill>
-                  <a:srgbClr val="4636B0"/>
+                  <a:srgbClr val="14181A"/>
                 </a:solidFill>
                 <a:latin typeface="Arial" pitchFamily="34" charset="0"/>
                 <a:ea typeface="Arial" pitchFamily="34" charset="-122"/>
@@ -6068,7 +6068,7 @@
             <a:r>
               <a:rPr lang="en-US" sz="1350" b="1" dirty="0">
                 <a:solidFill>
-                  <a:srgbClr val="4636B0"/>
+                  <a:srgbClr val="14181A"/>
                 </a:solidFill>
                 <a:latin typeface="Arial" pitchFamily="34" charset="0"/>
                 <a:ea typeface="Arial" pitchFamily="34" charset="-122"/>
@@ -6107,7 +6107,7 @@
             <a:r>
               <a:rPr lang="en-US" sz="1350" b="1" dirty="0">
                 <a:solidFill>
-                  <a:srgbClr val="4636B0"/>
+                  <a:srgbClr val="14181A"/>
                 </a:solidFill>
                 <a:latin typeface="Arial" pitchFamily="34" charset="0"/>
                 <a:ea typeface="Arial" pitchFamily="34" charset="-122"/>
@@ -6136,7 +6136,7 @@
           <a:noFill/>
           <a:ln w="9525">
             <a:solidFill>
-              <a:srgbClr val="E3E6EE"/>
+              <a:srgbClr val="E2E5E1"/>
             </a:solidFill>
             <a:prstDash val="solid"/>
           </a:ln>
@@ -6176,7 +6176,7 @@
             <a:r>
               <a:rPr lang="en-US" sz="1150" dirty="0">
                 <a:solidFill>
-                  <a:srgbClr val="3D4556"/>
+                  <a:srgbClr val="3A423F"/>
                 </a:solidFill>
                 <a:latin typeface="Arial" pitchFamily="34" charset="0"/>
                 <a:ea typeface="Arial" pitchFamily="34" charset="-122"/>
@@ -6200,7 +6200,7 @@
             <a:r>
               <a:rPr lang="en-US" sz="1150" dirty="0">
                 <a:solidFill>
-                  <a:srgbClr val="3D4556"/>
+                  <a:srgbClr val="3A423F"/>
                 </a:solidFill>
                 <a:latin typeface="Arial" pitchFamily="34" charset="0"/>
                 <a:ea typeface="Arial" pitchFamily="34" charset="-122"/>
@@ -6224,7 +6224,7 @@
             <a:r>
               <a:rPr lang="en-US" sz="1150" dirty="0">
                 <a:solidFill>
-                  <a:srgbClr val="3D4556"/>
+                  <a:srgbClr val="3A423F"/>
                 </a:solidFill>
                 <a:latin typeface="Arial" pitchFamily="34" charset="0"/>
                 <a:ea typeface="Arial" pitchFamily="34" charset="-122"/>
@@ -6270,7 +6270,7 @@
             <a:r>
               <a:rPr lang="en-US" sz="1150" dirty="0">
                 <a:solidFill>
-                  <a:srgbClr val="3D4556"/>
+                  <a:srgbClr val="3A423F"/>
                 </a:solidFill>
                 <a:latin typeface="Arial" pitchFamily="34" charset="0"/>
                 <a:ea typeface="Arial" pitchFamily="34" charset="-122"/>
@@ -6294,7 +6294,7 @@
             <a:r>
               <a:rPr lang="en-US" sz="1150" dirty="0">
                 <a:solidFill>
-                  <a:srgbClr val="3D4556"/>
+                  <a:srgbClr val="3A423F"/>
                 </a:solidFill>
                 <a:latin typeface="Arial" pitchFamily="34" charset="0"/>
                 <a:ea typeface="Arial" pitchFamily="34" charset="-122"/>
@@ -6318,7 +6318,7 @@
             <a:r>
               <a:rPr lang="en-US" sz="1150" dirty="0">
                 <a:solidFill>
-                  <a:srgbClr val="3D4556"/>
+                  <a:srgbClr val="3A423F"/>
                 </a:solidFill>
                 <a:latin typeface="Arial" pitchFamily="34" charset="0"/>
                 <a:ea typeface="Arial" pitchFamily="34" charset="-122"/>
@@ -6342,7 +6342,7 @@
             <a:r>
               <a:rPr lang="en-US" sz="1150" dirty="0">
                 <a:solidFill>
-                  <a:srgbClr val="3D4556"/>
+                  <a:srgbClr val="3A423F"/>
                 </a:solidFill>
                 <a:latin typeface="Arial" pitchFamily="34" charset="0"/>
                 <a:ea typeface="Arial" pitchFamily="34" charset="-122"/>
@@ -6367,15 +6367,15 @@
           </a:xfrm>
           <a:prstGeom prst="roundRect">
             <a:avLst>
-              <a:gd name="adj" fmla="val 8421"/>
+              <a:gd name="adj" fmla="val 4211"/>
             </a:avLst>
           </a:prstGeom>
           <a:solidFill>
-            <a:srgbClr val="F4F5F9"/>
+            <a:srgbClr val="F2F3F1"/>
           </a:solidFill>
           <a:ln w="12700">
             <a:solidFill>
-              <a:srgbClr val="F4F5F9"/>
+              <a:srgbClr val="F2F3F1"/>
             </a:solidFill>
             <a:prstDash val="solid"/>
           </a:ln>
@@ -6408,7 +6408,7 @@
             <a:r>
               <a:rPr lang="en-US" sz="950" b="1" dirty="0">
                 <a:solidFill>
-                  <a:srgbClr val="5B6475"/>
+                  <a:srgbClr val="575F5C"/>
                 </a:solidFill>
                 <a:latin typeface="Arial" pitchFamily="34" charset="0"/>
                 <a:ea typeface="Arial" pitchFamily="34" charset="-122"/>
@@ -6450,7 +6450,7 @@
             <a:r>
               <a:rPr lang="en-US" sz="1150" i="1" dirty="0">
                 <a:solidFill>
-                  <a:srgbClr val="3D4556"/>
+                  <a:srgbClr val="3A423F"/>
                 </a:solidFill>
                 <a:latin typeface="Arial" pitchFamily="34" charset="0"/>
                 <a:ea typeface="Arial" pitchFamily="34" charset="-122"/>
@@ -6489,7 +6489,7 @@
             <a:r>
               <a:rPr lang="en-US" sz="900" dirty="0">
                 <a:solidFill>
-                  <a:srgbClr val="5B6475"/>
+                  <a:srgbClr val="575F5C"/>
                 </a:solidFill>
                 <a:latin typeface="Arial" pitchFamily="34" charset="0"/>
                 <a:ea typeface="Arial" pitchFamily="34" charset="-122"/>
@@ -6528,7 +6528,7 @@
             <a:r>
               <a:rPr lang="en-US" sz="900" dirty="0">
                 <a:solidFill>
-                  <a:srgbClr val="5B6475"/>
+                  <a:srgbClr val="575F5C"/>
                 </a:solidFill>
                 <a:latin typeface="Arial" pitchFamily="34" charset="0"/>
                 <a:ea typeface="Arial" pitchFamily="34" charset="-122"/>
@@ -6623,7 +6623,7 @@
             <a:r>
               <a:rPr lang="en-US" sz="1600" b="1" dirty="0">
                 <a:solidFill>
-                  <a:srgbClr val="0B0F19"/>
+                  <a:srgbClr val="14181A"/>
                 </a:solidFill>
                 <a:latin typeface="Arial" pitchFamily="34" charset="0"/>
                 <a:ea typeface="Arial" pitchFamily="34" charset="-122"/>
@@ -6662,7 +6662,7 @@
             <a:r>
               <a:rPr lang="en-US" sz="1000" dirty="0">
                 <a:solidFill>
-                  <a:srgbClr val="5B6475"/>
+                  <a:srgbClr val="575F5C"/>
                 </a:solidFill>
                 <a:latin typeface="Arial" pitchFamily="34" charset="0"/>
                 <a:ea typeface="Arial" pitchFamily="34" charset="-122"/>
@@ -6683,17 +6683,17 @@
         <p:spPr>
           <a:xfrm>
             <a:off x="731520" y="877824"/>
-            <a:ext cx="10725912" cy="25603"/>
+            <a:ext cx="10725912" cy="10973"/>
           </a:xfrm>
           <a:prstGeom prst="rect">
             <a:avLst/>
           </a:prstGeom>
           <a:solidFill>
-            <a:srgbClr val="38C9FF"/>
+            <a:srgbClr val="E2E5E1"/>
           </a:solidFill>
           <a:ln w="12700">
             <a:solidFill>
-              <a:srgbClr val="38C9FF"/>
+              <a:srgbClr val="E2E5E1"/>
             </a:solidFill>
             <a:prstDash val="solid"/>
           </a:ln>
@@ -6729,7 +6729,7 @@
             <a:r>
               <a:rPr lang="en-US" sz="2600" b="1" dirty="0">
                 <a:solidFill>
-                  <a:srgbClr val="4636B0"/>
+                  <a:srgbClr val="14181A"/>
                 </a:solidFill>
                 <a:latin typeface="Arial" pitchFamily="34" charset="0"/>
                 <a:ea typeface="Arial" pitchFamily="34" charset="-122"/>
@@ -6771,7 +6771,7 @@
             <a:r>
               <a:rPr lang="en-US" sz="1250" i="1" dirty="0">
                 <a:solidFill>
-                  <a:srgbClr val="5B6475"/>
+                  <a:srgbClr val="575F5C"/>
                 </a:solidFill>
                 <a:latin typeface="Arial" pitchFamily="34" charset="0"/>
                 <a:ea typeface="Arial" pitchFamily="34" charset="-122"/>
@@ -6816,7 +6816,7 @@
             <a:r>
               <a:rPr lang="en-US" sz="1200" b="1" dirty="0">
                 <a:solidFill>
-                  <a:srgbClr val="0B0F19"/>
+                  <a:srgbClr val="14181A"/>
                 </a:solidFill>
                 <a:latin typeface="Arial" pitchFamily="34" charset="0"/>
                 <a:ea typeface="Arial" pitchFamily="34" charset="-122"/>
@@ -6836,7 +6836,7 @@
             <a:r>
               <a:rPr lang="en-US" sz="1200" dirty="0">
                 <a:solidFill>
-                  <a:srgbClr val="3D4556"/>
+                  <a:srgbClr val="3A423F"/>
                 </a:solidFill>
                 <a:latin typeface="Arial" pitchFamily="34" charset="0"/>
                 <a:ea typeface="Arial" pitchFamily="34" charset="-122"/>
@@ -6859,7 +6859,7 @@
             <a:r>
               <a:rPr lang="en-US" sz="1200" b="1" dirty="0">
                 <a:solidFill>
-                  <a:srgbClr val="0B0F19"/>
+                  <a:srgbClr val="14181A"/>
                 </a:solidFill>
                 <a:latin typeface="Arial" pitchFamily="34" charset="0"/>
                 <a:ea typeface="Arial" pitchFamily="34" charset="-122"/>
@@ -6879,7 +6879,7 @@
             <a:r>
               <a:rPr lang="en-US" sz="1200" dirty="0">
                 <a:solidFill>
-                  <a:srgbClr val="3D4556"/>
+                  <a:srgbClr val="3A423F"/>
                 </a:solidFill>
                 <a:latin typeface="Arial" pitchFamily="34" charset="0"/>
                 <a:ea typeface="Arial" pitchFamily="34" charset="-122"/>
@@ -6902,7 +6902,7 @@
             <a:r>
               <a:rPr lang="en-US" sz="1200" b="1" dirty="0">
                 <a:solidFill>
-                  <a:srgbClr val="0B0F19"/>
+                  <a:srgbClr val="14181A"/>
                 </a:solidFill>
                 <a:latin typeface="Arial" pitchFamily="34" charset="0"/>
                 <a:ea typeface="Arial" pitchFamily="34" charset="-122"/>
@@ -6922,7 +6922,7 @@
             <a:r>
               <a:rPr lang="en-US" sz="1200" dirty="0">
                 <a:solidFill>
-                  <a:srgbClr val="3D4556"/>
+                  <a:srgbClr val="3A423F"/>
                 </a:solidFill>
                 <a:latin typeface="Arial" pitchFamily="34" charset="0"/>
                 <a:ea typeface="Arial" pitchFamily="34" charset="-122"/>
@@ -6945,7 +6945,7 @@
             <a:r>
               <a:rPr lang="en-US" sz="1200" b="1" dirty="0">
                 <a:solidFill>
-                  <a:srgbClr val="0B0F19"/>
+                  <a:srgbClr val="14181A"/>
                 </a:solidFill>
                 <a:latin typeface="Arial" pitchFamily="34" charset="0"/>
                 <a:ea typeface="Arial" pitchFamily="34" charset="-122"/>
@@ -6965,7 +6965,7 @@
             <a:r>
               <a:rPr lang="en-US" sz="1200" dirty="0">
                 <a:solidFill>
-                  <a:srgbClr val="3D4556"/>
+                  <a:srgbClr val="3A423F"/>
                 </a:solidFill>
                 <a:latin typeface="Arial" pitchFamily="34" charset="0"/>
                 <a:ea typeface="Arial" pitchFamily="34" charset="-122"/>
@@ -6988,7 +6988,7 @@
             <a:r>
               <a:rPr lang="en-US" sz="1200" b="1" dirty="0">
                 <a:solidFill>
-                  <a:srgbClr val="0B0F19"/>
+                  <a:srgbClr val="14181A"/>
                 </a:solidFill>
                 <a:latin typeface="Arial" pitchFamily="34" charset="0"/>
                 <a:ea typeface="Arial" pitchFamily="34" charset="-122"/>
@@ -7008,7 +7008,7 @@
             <a:r>
               <a:rPr lang="en-US" sz="1200" dirty="0">
                 <a:solidFill>
-                  <a:srgbClr val="3D4556"/>
+                  <a:srgbClr val="3A423F"/>
                 </a:solidFill>
                 <a:latin typeface="Arial" pitchFamily="34" charset="0"/>
                 <a:ea typeface="Arial" pitchFamily="34" charset="-122"/>
@@ -7047,7 +7047,7 @@
             <a:r>
               <a:rPr lang="en-US" sz="900" dirty="0">
                 <a:solidFill>
-                  <a:srgbClr val="5B6475"/>
+                  <a:srgbClr val="575F5C"/>
                 </a:solidFill>
                 <a:latin typeface="Arial" pitchFamily="34" charset="0"/>
                 <a:ea typeface="Arial" pitchFamily="34" charset="-122"/>
@@ -7086,7 +7086,7 @@
             <a:r>
               <a:rPr lang="en-US" sz="900" dirty="0">
                 <a:solidFill>
-                  <a:srgbClr val="5B6475"/>
+                  <a:srgbClr val="575F5C"/>
                 </a:solidFill>
                 <a:latin typeface="Arial" pitchFamily="34" charset="0"/>
                 <a:ea typeface="Arial" pitchFamily="34" charset="-122"/>
@@ -7181,7 +7181,7 @@
             <a:r>
               <a:rPr lang="en-US" sz="2400" b="1" dirty="0">
                 <a:solidFill>
-                  <a:srgbClr val="0B0F19"/>
+                  <a:srgbClr val="14181A"/>
                 </a:solidFill>
                 <a:latin typeface="Arial" pitchFamily="34" charset="0"/>
                 <a:ea typeface="Arial" pitchFamily="34" charset="-122"/>
@@ -7202,17 +7202,17 @@
         <p:spPr>
           <a:xfrm>
             <a:off x="731520" y="1481328"/>
-            <a:ext cx="2377440" cy="25603"/>
+            <a:ext cx="2011680" cy="20117"/>
           </a:xfrm>
           <a:prstGeom prst="rect">
             <a:avLst/>
           </a:prstGeom>
           <a:solidFill>
-            <a:srgbClr val="38C9FF"/>
+            <a:srgbClr val="14181A"/>
           </a:solidFill>
           <a:ln w="12700">
             <a:solidFill>
-              <a:srgbClr val="38C9FF"/>
+              <a:srgbClr val="14181A"/>
             </a:solidFill>
             <a:prstDash val="solid"/>
           </a:ln>
@@ -7248,7 +7248,7 @@
             <a:r>
               <a:rPr lang="en-US" sz="3600" b="1" dirty="0">
                 <a:solidFill>
-                  <a:srgbClr val="4636B0"/>
+                  <a:srgbClr val="14181A"/>
                 </a:solidFill>
                 <a:latin typeface="Arial" pitchFamily="34" charset="0"/>
                 <a:ea typeface="Arial" pitchFamily="34" charset="-122"/>
@@ -7290,7 +7290,7 @@
             <a:r>
               <a:rPr lang="en-US" sz="1450" dirty="0">
                 <a:solidFill>
-                  <a:srgbClr val="3D4556"/>
+                  <a:srgbClr val="3A423F"/>
                 </a:solidFill>
                 <a:latin typeface="Arial" pitchFamily="34" charset="0"/>
                 <a:ea typeface="Arial" pitchFamily="34" charset="-122"/>
@@ -7329,7 +7329,7 @@
             <a:r>
               <a:rPr lang="en-US" sz="1500" b="1" dirty="0">
                 <a:solidFill>
-                  <a:srgbClr val="4636B0"/>
+                  <a:srgbClr val="14181A"/>
                 </a:solidFill>
                 <a:latin typeface="Arial" pitchFamily="34" charset="0"/>
                 <a:ea typeface="Arial" pitchFamily="34" charset="-122"/>
@@ -7368,7 +7368,7 @@
             <a:r>
               <a:rPr lang="en-US" sz="1050" dirty="0">
                 <a:solidFill>
-                  <a:srgbClr val="5B6475"/>
+                  <a:srgbClr val="575F5C"/>
                 </a:solidFill>
                 <a:latin typeface="Arial" pitchFamily="34" charset="0"/>
                 <a:ea typeface="Arial" pitchFamily="34" charset="-122"/>
@@ -7463,7 +7463,7 @@
             <a:r>
               <a:rPr lang="en-US" sz="1600" b="1" dirty="0">
                 <a:solidFill>
-                  <a:srgbClr val="0B0F19"/>
+                  <a:srgbClr val="14181A"/>
                 </a:solidFill>
                 <a:latin typeface="Arial" pitchFamily="34" charset="0"/>
                 <a:ea typeface="Arial" pitchFamily="34" charset="-122"/>
@@ -7502,7 +7502,7 @@
             <a:r>
               <a:rPr lang="en-US" sz="1000" dirty="0">
                 <a:solidFill>
-                  <a:srgbClr val="5B6475"/>
+                  <a:srgbClr val="575F5C"/>
                 </a:solidFill>
                 <a:latin typeface="Arial" pitchFamily="34" charset="0"/>
                 <a:ea typeface="Arial" pitchFamily="34" charset="-122"/>
@@ -7523,17 +7523,17 @@
         <p:spPr>
           <a:xfrm>
             <a:off x="731520" y="877824"/>
-            <a:ext cx="10725912" cy="25603"/>
+            <a:ext cx="10725912" cy="10973"/>
           </a:xfrm>
           <a:prstGeom prst="rect">
             <a:avLst/>
           </a:prstGeom>
           <a:solidFill>
-            <a:srgbClr val="38C9FF"/>
+            <a:srgbClr val="E2E5E1"/>
           </a:solidFill>
           <a:ln w="12700">
             <a:solidFill>
-              <a:srgbClr val="38C9FF"/>
+              <a:srgbClr val="E2E5E1"/>
             </a:solidFill>
             <a:prstDash val="solid"/>
           </a:ln>
@@ -7569,7 +7569,7 @@
             <a:r>
               <a:rPr lang="en-US" sz="2600" b="1" dirty="0">
                 <a:solidFill>
-                  <a:srgbClr val="4636B0"/>
+                  <a:srgbClr val="14181A"/>
                 </a:solidFill>
                 <a:latin typeface="Arial" pitchFamily="34" charset="0"/>
                 <a:ea typeface="Arial" pitchFamily="34" charset="-122"/>
@@ -7614,7 +7614,7 @@
             <a:r>
               <a:rPr lang="en-US" sz="1300" b="1" dirty="0">
                 <a:solidFill>
-                  <a:srgbClr val="0B0F19"/>
+                  <a:srgbClr val="14181A"/>
                 </a:solidFill>
                 <a:latin typeface="Arial" pitchFamily="34" charset="0"/>
                 <a:ea typeface="Arial" pitchFamily="34" charset="-122"/>
@@ -7634,7 +7634,7 @@
             <a:r>
               <a:rPr lang="en-US" sz="1300" dirty="0">
                 <a:solidFill>
-                  <a:srgbClr val="3D4556"/>
+                  <a:srgbClr val="3A423F"/>
                 </a:solidFill>
                 <a:latin typeface="Arial" pitchFamily="34" charset="0"/>
                 <a:ea typeface="Arial" pitchFamily="34" charset="-122"/>
@@ -7657,7 +7657,7 @@
             <a:r>
               <a:rPr lang="en-US" sz="1300" b="1" dirty="0">
                 <a:solidFill>
-                  <a:srgbClr val="0B0F19"/>
+                  <a:srgbClr val="14181A"/>
                 </a:solidFill>
                 <a:latin typeface="Arial" pitchFamily="34" charset="0"/>
                 <a:ea typeface="Arial" pitchFamily="34" charset="-122"/>
@@ -7677,7 +7677,7 @@
             <a:r>
               <a:rPr lang="en-US" sz="1300" dirty="0">
                 <a:solidFill>
-                  <a:srgbClr val="3D4556"/>
+                  <a:srgbClr val="3A423F"/>
                 </a:solidFill>
                 <a:latin typeface="Arial" pitchFamily="34" charset="0"/>
                 <a:ea typeface="Arial" pitchFamily="34" charset="-122"/>
@@ -7700,7 +7700,7 @@
             <a:r>
               <a:rPr lang="en-US" sz="1300" b="1" dirty="0">
                 <a:solidFill>
-                  <a:srgbClr val="0B0F19"/>
+                  <a:srgbClr val="14181A"/>
                 </a:solidFill>
                 <a:latin typeface="Arial" pitchFamily="34" charset="0"/>
                 <a:ea typeface="Arial" pitchFamily="34" charset="-122"/>
@@ -7720,7 +7720,7 @@
             <a:r>
               <a:rPr lang="en-US" sz="1300" dirty="0">
                 <a:solidFill>
-                  <a:srgbClr val="3D4556"/>
+                  <a:srgbClr val="3A423F"/>
                 </a:solidFill>
                 <a:latin typeface="Arial" pitchFamily="34" charset="0"/>
                 <a:ea typeface="Arial" pitchFamily="34" charset="-122"/>
@@ -7743,7 +7743,7 @@
             <a:r>
               <a:rPr lang="en-US" sz="1300" b="1" dirty="0">
                 <a:solidFill>
-                  <a:srgbClr val="0B0F19"/>
+                  <a:srgbClr val="14181A"/>
                 </a:solidFill>
                 <a:latin typeface="Arial" pitchFamily="34" charset="0"/>
                 <a:ea typeface="Arial" pitchFamily="34" charset="-122"/>
@@ -7763,7 +7763,7 @@
             <a:r>
               <a:rPr lang="en-US" sz="1300" dirty="0">
                 <a:solidFill>
-                  <a:srgbClr val="3D4556"/>
+                  <a:srgbClr val="3A423F"/>
                 </a:solidFill>
                 <a:latin typeface="Arial" pitchFamily="34" charset="0"/>
                 <a:ea typeface="Arial" pitchFamily="34" charset="-122"/>
@@ -7802,7 +7802,7 @@
             <a:r>
               <a:rPr lang="en-US" sz="900" dirty="0">
                 <a:solidFill>
-                  <a:srgbClr val="5B6475"/>
+                  <a:srgbClr val="575F5C"/>
                 </a:solidFill>
                 <a:latin typeface="Arial" pitchFamily="34" charset="0"/>
                 <a:ea typeface="Arial" pitchFamily="34" charset="-122"/>
@@ -7841,7 +7841,7 @@
             <a:r>
               <a:rPr lang="en-US" sz="900" dirty="0">
                 <a:solidFill>
-                  <a:srgbClr val="5B6475"/>
+                  <a:srgbClr val="575F5C"/>
                 </a:solidFill>
                 <a:latin typeface="Arial" pitchFamily="34" charset="0"/>
                 <a:ea typeface="Arial" pitchFamily="34" charset="-122"/>
@@ -7936,7 +7936,7 @@
             <a:r>
               <a:rPr lang="en-US" sz="1600" b="1" dirty="0">
                 <a:solidFill>
-                  <a:srgbClr val="0B0F19"/>
+                  <a:srgbClr val="14181A"/>
                 </a:solidFill>
                 <a:latin typeface="Arial" pitchFamily="34" charset="0"/>
                 <a:ea typeface="Arial" pitchFamily="34" charset="-122"/>
@@ -7975,7 +7975,7 @@
             <a:r>
               <a:rPr lang="en-US" sz="1000" dirty="0">
                 <a:solidFill>
-                  <a:srgbClr val="5B6475"/>
+                  <a:srgbClr val="575F5C"/>
                 </a:solidFill>
                 <a:latin typeface="Arial" pitchFamily="34" charset="0"/>
                 <a:ea typeface="Arial" pitchFamily="34" charset="-122"/>
@@ -7996,17 +7996,17 @@
         <p:spPr>
           <a:xfrm>
             <a:off x="731520" y="877824"/>
-            <a:ext cx="10725912" cy="25603"/>
+            <a:ext cx="10725912" cy="10973"/>
           </a:xfrm>
           <a:prstGeom prst="rect">
             <a:avLst/>
           </a:prstGeom>
           <a:solidFill>
-            <a:srgbClr val="38C9FF"/>
+            <a:srgbClr val="E2E5E1"/>
           </a:solidFill>
           <a:ln w="12700">
             <a:solidFill>
-              <a:srgbClr val="38C9FF"/>
+              <a:srgbClr val="E2E5E1"/>
             </a:solidFill>
             <a:prstDash val="solid"/>
           </a:ln>
@@ -8042,7 +8042,7 @@
             <a:r>
               <a:rPr lang="en-US" sz="2600" b="1" dirty="0">
                 <a:solidFill>
-                  <a:srgbClr val="4636B0"/>
+                  <a:srgbClr val="14181A"/>
                 </a:solidFill>
                 <a:latin typeface="Arial" pitchFamily="34" charset="0"/>
                 <a:ea typeface="Arial" pitchFamily="34" charset="-122"/>
@@ -8067,15 +8067,15 @@
           </a:xfrm>
           <a:prstGeom prst="roundRect">
             <a:avLst>
-              <a:gd name="adj" fmla="val 5405"/>
+              <a:gd name="adj" fmla="val 2162"/>
             </a:avLst>
           </a:prstGeom>
           <a:solidFill>
-            <a:srgbClr val="F4F5F9"/>
+            <a:srgbClr val="F2F3F1"/>
           </a:solidFill>
           <a:ln w="12700">
             <a:solidFill>
-              <a:srgbClr val="E3E6EE"/>
+              <a:srgbClr val="E2E5E1"/>
             </a:solidFill>
             <a:prstDash val="solid"/>
           </a:ln>
@@ -8108,7 +8108,7 @@
             <a:r>
               <a:rPr lang="en-US" sz="1250" b="1" dirty="0">
                 <a:solidFill>
-                  <a:srgbClr val="0B0F19"/>
+                  <a:srgbClr val="14181A"/>
                 </a:solidFill>
                 <a:latin typeface="Arial" pitchFamily="34" charset="0"/>
                 <a:ea typeface="Arial" pitchFamily="34" charset="-122"/>
@@ -8150,7 +8150,7 @@
             <a:r>
               <a:rPr lang="en-US" sz="1050" dirty="0">
                 <a:solidFill>
-                  <a:srgbClr val="3D4556"/>
+                  <a:srgbClr val="3A423F"/>
                 </a:solidFill>
                 <a:latin typeface="Arial" pitchFamily="34" charset="0"/>
                 <a:ea typeface="Arial" pitchFamily="34" charset="-122"/>
@@ -8170,7 +8170,7 @@
             <a:r>
               <a:rPr lang="en-US" sz="1050" dirty="0">
                 <a:solidFill>
-                  <a:srgbClr val="3D4556"/>
+                  <a:srgbClr val="3A423F"/>
                 </a:solidFill>
                 <a:latin typeface="Arial" pitchFamily="34" charset="0"/>
                 <a:ea typeface="Arial" pitchFamily="34" charset="-122"/>
@@ -8195,15 +8195,15 @@
           </a:xfrm>
           <a:prstGeom prst="roundRect">
             <a:avLst>
-              <a:gd name="adj" fmla="val 5405"/>
+              <a:gd name="adj" fmla="val 2162"/>
             </a:avLst>
           </a:prstGeom>
           <a:solidFill>
-            <a:srgbClr val="EEEEFC"/>
+            <a:srgbClr val="E7EDE9"/>
           </a:solidFill>
           <a:ln w="12700">
             <a:solidFill>
-              <a:srgbClr val="6366F1"/>
+              <a:srgbClr val="1E4D3B"/>
             </a:solidFill>
             <a:prstDash val="solid"/>
           </a:ln>
@@ -8236,7 +8236,7 @@
             <a:r>
               <a:rPr lang="en-US" sz="1250" b="1" dirty="0">
                 <a:solidFill>
-                  <a:srgbClr val="0B0F19"/>
+                  <a:srgbClr val="14181A"/>
                 </a:solidFill>
                 <a:latin typeface="Arial" pitchFamily="34" charset="0"/>
                 <a:ea typeface="Arial" pitchFamily="34" charset="-122"/>
@@ -8278,7 +8278,7 @@
             <a:r>
               <a:rPr lang="en-US" sz="1050" dirty="0">
                 <a:solidFill>
-                  <a:srgbClr val="3D4556"/>
+                  <a:srgbClr val="3A423F"/>
                 </a:solidFill>
                 <a:latin typeface="Arial" pitchFamily="34" charset="0"/>
                 <a:ea typeface="Arial" pitchFamily="34" charset="-122"/>
@@ -8298,7 +8298,7 @@
             <a:r>
               <a:rPr lang="en-US" sz="1050" dirty="0">
                 <a:solidFill>
-                  <a:srgbClr val="3D4556"/>
+                  <a:srgbClr val="3A423F"/>
                 </a:solidFill>
                 <a:latin typeface="Arial" pitchFamily="34" charset="0"/>
                 <a:ea typeface="Arial" pitchFamily="34" charset="-122"/>
@@ -8323,15 +8323,15 @@
           </a:xfrm>
           <a:prstGeom prst="roundRect">
             <a:avLst>
-              <a:gd name="adj" fmla="val 5405"/>
+              <a:gd name="adj" fmla="val 2162"/>
             </a:avLst>
           </a:prstGeom>
           <a:solidFill>
-            <a:srgbClr val="F4F5F9"/>
+            <a:srgbClr val="F2F3F1"/>
           </a:solidFill>
           <a:ln w="12700">
             <a:solidFill>
-              <a:srgbClr val="E3E6EE"/>
+              <a:srgbClr val="E2E5E1"/>
             </a:solidFill>
             <a:prstDash val="solid"/>
           </a:ln>
@@ -8364,7 +8364,7 @@
             <a:r>
               <a:rPr lang="en-US" sz="1250" b="1" dirty="0">
                 <a:solidFill>
-                  <a:srgbClr val="0B0F19"/>
+                  <a:srgbClr val="14181A"/>
                 </a:solidFill>
                 <a:latin typeface="Arial" pitchFamily="34" charset="0"/>
                 <a:ea typeface="Arial" pitchFamily="34" charset="-122"/>
@@ -8406,7 +8406,7 @@
             <a:r>
               <a:rPr lang="en-US" sz="1050" dirty="0">
                 <a:solidFill>
-                  <a:srgbClr val="3D4556"/>
+                  <a:srgbClr val="3A423F"/>
                 </a:solidFill>
                 <a:latin typeface="Arial" pitchFamily="34" charset="0"/>
                 <a:ea typeface="Arial" pitchFamily="34" charset="-122"/>
@@ -8426,7 +8426,7 @@
             <a:r>
               <a:rPr lang="en-US" sz="1050" dirty="0">
                 <a:solidFill>
-                  <a:srgbClr val="3D4556"/>
+                  <a:srgbClr val="3A423F"/>
                 </a:solidFill>
                 <a:latin typeface="Arial" pitchFamily="34" charset="0"/>
                 <a:ea typeface="Arial" pitchFamily="34" charset="-122"/>
@@ -8455,7 +8455,7 @@
           <a:noFill/>
           <a:ln w="12700">
             <a:solidFill>
-              <a:srgbClr val="5B6475"/>
+              <a:srgbClr val="575F5C"/>
             </a:solidFill>
             <a:prstDash val="dash"/>
           </a:ln>
@@ -8488,7 +8488,7 @@
             <a:r>
               <a:rPr lang="en-US" sz="850" dirty="0">
                 <a:solidFill>
-                  <a:srgbClr val="5B6475"/>
+                  <a:srgbClr val="575F5C"/>
                 </a:solidFill>
                 <a:latin typeface="Arial" pitchFamily="34" charset="0"/>
                 <a:ea typeface="Arial" pitchFamily="34" charset="-122"/>
@@ -8517,7 +8517,7 @@
           <a:noFill/>
           <a:ln w="12700">
             <a:solidFill>
-              <a:srgbClr val="5B6475"/>
+              <a:srgbClr val="575F5C"/>
             </a:solidFill>
             <a:prstDash val="dash"/>
           </a:ln>
@@ -8550,7 +8550,7 @@
             <a:r>
               <a:rPr lang="en-US" sz="850" dirty="0">
                 <a:solidFill>
-                  <a:srgbClr val="5B6475"/>
+                  <a:srgbClr val="575F5C"/>
                 </a:solidFill>
                 <a:latin typeface="Arial" pitchFamily="34" charset="0"/>
                 <a:ea typeface="Arial" pitchFamily="34" charset="-122"/>
@@ -8575,15 +8575,15 @@
           </a:xfrm>
           <a:prstGeom prst="roundRect">
             <a:avLst>
-              <a:gd name="adj" fmla="val 7692"/>
+              <a:gd name="adj" fmla="val 3077"/>
             </a:avLst>
           </a:prstGeom>
           <a:solidFill>
-            <a:srgbClr val="F4F5F9"/>
+            <a:srgbClr val="F2F3F1"/>
           </a:solidFill>
           <a:ln w="12700">
             <a:solidFill>
-              <a:srgbClr val="E3E6EE"/>
+              <a:srgbClr val="E2E5E1"/>
             </a:solidFill>
             <a:prstDash val="solid"/>
           </a:ln>
@@ -8616,7 +8616,7 @@
             <a:r>
               <a:rPr lang="en-US" sz="1250" b="1" dirty="0">
                 <a:solidFill>
-                  <a:srgbClr val="0B0F19"/>
+                  <a:srgbClr val="14181A"/>
                 </a:solidFill>
                 <a:latin typeface="Arial" pitchFamily="34" charset="0"/>
                 <a:ea typeface="Arial" pitchFamily="34" charset="-122"/>
@@ -8658,7 +8658,7 @@
             <a:r>
               <a:rPr lang="en-US" sz="1050" dirty="0">
                 <a:solidFill>
-                  <a:srgbClr val="3D4556"/>
+                  <a:srgbClr val="3A423F"/>
                 </a:solidFill>
                 <a:latin typeface="Arial" pitchFamily="34" charset="0"/>
                 <a:ea typeface="Arial" pitchFamily="34" charset="-122"/>
@@ -8683,15 +8683,15 @@
           </a:xfrm>
           <a:prstGeom prst="roundRect">
             <a:avLst>
-              <a:gd name="adj" fmla="val 7692"/>
+              <a:gd name="adj" fmla="val 3077"/>
             </a:avLst>
           </a:prstGeom>
           <a:solidFill>
-            <a:srgbClr val="F4F5F9"/>
+            <a:srgbClr val="F2F3F1"/>
           </a:solidFill>
           <a:ln w="12700">
             <a:solidFill>
-              <a:srgbClr val="E3E6EE"/>
+              <a:srgbClr val="E2E5E1"/>
             </a:solidFill>
             <a:prstDash val="solid"/>
           </a:ln>
@@ -8724,7 +8724,7 @@
             <a:r>
               <a:rPr lang="en-US" sz="1250" b="1" dirty="0">
                 <a:solidFill>
-                  <a:srgbClr val="0B0F19"/>
+                  <a:srgbClr val="14181A"/>
                 </a:solidFill>
                 <a:latin typeface="Arial" pitchFamily="34" charset="0"/>
                 <a:ea typeface="Arial" pitchFamily="34" charset="-122"/>
@@ -8766,7 +8766,7 @@
             <a:r>
               <a:rPr lang="en-US" sz="1050" dirty="0">
                 <a:solidFill>
-                  <a:srgbClr val="3D4556"/>
+                  <a:srgbClr val="3A423F"/>
                 </a:solidFill>
                 <a:latin typeface="Arial" pitchFamily="34" charset="0"/>
                 <a:ea typeface="Arial" pitchFamily="34" charset="-122"/>
@@ -8791,15 +8791,15 @@
           </a:xfrm>
           <a:prstGeom prst="roundRect">
             <a:avLst>
-              <a:gd name="adj" fmla="val 7692"/>
+              <a:gd name="adj" fmla="val 3077"/>
             </a:avLst>
           </a:prstGeom>
           <a:solidFill>
-            <a:srgbClr val="F4F5F9"/>
+            <a:srgbClr val="F2F3F1"/>
           </a:solidFill>
           <a:ln w="12700">
             <a:solidFill>
-              <a:srgbClr val="E3E6EE"/>
+              <a:srgbClr val="E2E5E1"/>
             </a:solidFill>
             <a:prstDash val="solid"/>
           </a:ln>
@@ -8832,7 +8832,7 @@
             <a:r>
               <a:rPr lang="en-US" sz="1250" b="1" dirty="0">
                 <a:solidFill>
-                  <a:srgbClr val="0B0F19"/>
+                  <a:srgbClr val="14181A"/>
                 </a:solidFill>
                 <a:latin typeface="Arial" pitchFamily="34" charset="0"/>
                 <a:ea typeface="Arial" pitchFamily="34" charset="-122"/>
@@ -8874,7 +8874,7 @@
             <a:r>
               <a:rPr lang="en-US" sz="1050" dirty="0">
                 <a:solidFill>
-                  <a:srgbClr val="3D4556"/>
+                  <a:srgbClr val="3A423F"/>
                 </a:solidFill>
                 <a:latin typeface="Arial" pitchFamily="34" charset="0"/>
                 <a:ea typeface="Arial" pitchFamily="34" charset="-122"/>
@@ -8903,7 +8903,7 @@
           <a:noFill/>
           <a:ln w="12700">
             <a:solidFill>
-              <a:srgbClr val="5B6475"/>
+              <a:srgbClr val="575F5C"/>
             </a:solidFill>
             <a:prstDash val="dash"/>
           </a:ln>
@@ -8926,7 +8926,7 @@
           <a:noFill/>
           <a:ln w="12700">
             <a:solidFill>
-              <a:srgbClr val="5B6475"/>
+              <a:srgbClr val="575F5C"/>
             </a:solidFill>
             <a:prstDash val="dash"/>
           </a:ln>
@@ -8962,7 +8962,7 @@
             <a:r>
               <a:rPr lang="en-US" sz="1150" i="1" dirty="0">
                 <a:solidFill>
-                  <a:srgbClr val="5B6475"/>
+                  <a:srgbClr val="575F5C"/>
                 </a:solidFill>
                 <a:latin typeface="Arial" pitchFamily="34" charset="0"/>
                 <a:ea typeface="Arial" pitchFamily="34" charset="-122"/>
@@ -9001,7 +9001,7 @@
             <a:r>
               <a:rPr lang="en-US" sz="900" dirty="0">
                 <a:solidFill>
-                  <a:srgbClr val="5B6475"/>
+                  <a:srgbClr val="575F5C"/>
                 </a:solidFill>
                 <a:latin typeface="Arial" pitchFamily="34" charset="0"/>
                 <a:ea typeface="Arial" pitchFamily="34" charset="-122"/>
@@ -9040,7 +9040,7 @@
             <a:r>
               <a:rPr lang="en-US" sz="900" dirty="0">
                 <a:solidFill>
-                  <a:srgbClr val="5B6475"/>
+                  <a:srgbClr val="575F5C"/>
                 </a:solidFill>
                 <a:latin typeface="Arial" pitchFamily="34" charset="0"/>
                 <a:ea typeface="Arial" pitchFamily="34" charset="-122"/>
@@ -9135,7 +9135,7 @@
             <a:r>
               <a:rPr lang="en-US" sz="1600" b="1" dirty="0">
                 <a:solidFill>
-                  <a:srgbClr val="0B0F19"/>
+                  <a:srgbClr val="14181A"/>
                 </a:solidFill>
                 <a:latin typeface="Arial" pitchFamily="34" charset="0"/>
                 <a:ea typeface="Arial" pitchFamily="34" charset="-122"/>
@@ -9174,7 +9174,7 @@
             <a:r>
               <a:rPr lang="en-US" sz="1000" dirty="0">
                 <a:solidFill>
-                  <a:srgbClr val="5B6475"/>
+                  <a:srgbClr val="575F5C"/>
                 </a:solidFill>
                 <a:latin typeface="Arial" pitchFamily="34" charset="0"/>
                 <a:ea typeface="Arial" pitchFamily="34" charset="-122"/>
@@ -9195,17 +9195,17 @@
         <p:spPr>
           <a:xfrm>
             <a:off x="731520" y="877824"/>
-            <a:ext cx="10725912" cy="25603"/>
+            <a:ext cx="10725912" cy="10973"/>
           </a:xfrm>
           <a:prstGeom prst="rect">
             <a:avLst/>
           </a:prstGeom>
           <a:solidFill>
-            <a:srgbClr val="38C9FF"/>
+            <a:srgbClr val="E2E5E1"/>
           </a:solidFill>
           <a:ln w="12700">
             <a:solidFill>
-              <a:srgbClr val="38C9FF"/>
+              <a:srgbClr val="E2E5E1"/>
             </a:solidFill>
             <a:prstDash val="solid"/>
           </a:ln>
@@ -9241,7 +9241,7 @@
             <a:r>
               <a:rPr lang="en-US" sz="2600" b="1" dirty="0">
                 <a:solidFill>
-                  <a:srgbClr val="4636B0"/>
+                  <a:srgbClr val="14181A"/>
                 </a:solidFill>
                 <a:latin typeface="Arial" pitchFamily="34" charset="0"/>
                 <a:ea typeface="Arial" pitchFamily="34" charset="-122"/>
@@ -9283,7 +9283,7 @@
             <a:r>
               <a:rPr lang="en-US" sz="1200" dirty="0">
                 <a:solidFill>
-                  <a:srgbClr val="3D4556"/>
+                  <a:srgbClr val="3A423F"/>
                 </a:solidFill>
                 <a:latin typeface="Arial" pitchFamily="34" charset="0"/>
                 <a:ea typeface="Arial" pitchFamily="34" charset="-122"/>
@@ -9322,7 +9322,7 @@
             <a:r>
               <a:rPr lang="en-US" sz="1000" b="1" dirty="0">
                 <a:solidFill>
-                  <a:srgbClr val="5B6475"/>
+                  <a:srgbClr val="575F5C"/>
                 </a:solidFill>
                 <a:latin typeface="Arial" pitchFamily="34" charset="0"/>
                 <a:ea typeface="Arial" pitchFamily="34" charset="-122"/>
@@ -9361,7 +9361,7 @@
             <a:r>
               <a:rPr lang="en-US" sz="1000" b="1" dirty="0">
                 <a:solidFill>
-                  <a:srgbClr val="5B6475"/>
+                  <a:srgbClr val="575F5C"/>
                 </a:solidFill>
                 <a:latin typeface="Arial" pitchFamily="34" charset="0"/>
                 <a:ea typeface="Arial" pitchFamily="34" charset="-122"/>
@@ -9400,7 +9400,7 @@
             <a:r>
               <a:rPr lang="en-US" sz="1000" b="1" dirty="0">
                 <a:solidFill>
-                  <a:srgbClr val="5B6475"/>
+                  <a:srgbClr val="575F5C"/>
                 </a:solidFill>
                 <a:latin typeface="Arial" pitchFamily="34" charset="0"/>
                 <a:ea typeface="Arial" pitchFamily="34" charset="-122"/>
@@ -9429,7 +9429,7 @@
           <a:noFill/>
           <a:ln w="9525">
             <a:solidFill>
-              <a:srgbClr val="E3E6EE"/>
+              <a:srgbClr val="E2E5E1"/>
             </a:solidFill>
             <a:prstDash val="solid"/>
           </a:ln>
@@ -9465,7 +9465,7 @@
             <a:r>
               <a:rPr lang="en-US" sz="1150" b="1" dirty="0">
                 <a:solidFill>
-                  <a:srgbClr val="0B0F19"/>
+                  <a:srgbClr val="14181A"/>
                 </a:solidFill>
                 <a:latin typeface="Arial" pitchFamily="34" charset="0"/>
                 <a:ea typeface="Arial" pitchFamily="34" charset="-122"/>
@@ -9507,7 +9507,7 @@
             <a:r>
               <a:rPr lang="en-US" sz="1150" dirty="0">
                 <a:solidFill>
-                  <a:srgbClr val="3D4556"/>
+                  <a:srgbClr val="3A423F"/>
                 </a:solidFill>
                 <a:latin typeface="Arial" pitchFamily="34" charset="0"/>
                 <a:ea typeface="Arial" pitchFamily="34" charset="-122"/>
@@ -9549,7 +9549,7 @@
             <a:r>
               <a:rPr lang="en-US" sz="1150" dirty="0">
                 <a:solidFill>
-                  <a:srgbClr val="3D4556"/>
+                  <a:srgbClr val="3A423F"/>
                 </a:solidFill>
                 <a:latin typeface="Arial" pitchFamily="34" charset="0"/>
                 <a:ea typeface="Arial" pitchFamily="34" charset="-122"/>
@@ -9578,7 +9578,7 @@
           <a:noFill/>
           <a:ln w="9525">
             <a:solidFill>
-              <a:srgbClr val="E3E6EE"/>
+              <a:srgbClr val="E2E5E1"/>
             </a:solidFill>
             <a:prstDash val="solid"/>
           </a:ln>
@@ -9614,7 +9614,7 @@
             <a:r>
               <a:rPr lang="en-US" sz="1150" b="1" dirty="0">
                 <a:solidFill>
-                  <a:srgbClr val="0B0F19"/>
+                  <a:srgbClr val="14181A"/>
                 </a:solidFill>
                 <a:latin typeface="Arial" pitchFamily="34" charset="0"/>
                 <a:ea typeface="Arial" pitchFamily="34" charset="-122"/>
@@ -9656,7 +9656,7 @@
             <a:r>
               <a:rPr lang="en-US" sz="1150" dirty="0">
                 <a:solidFill>
-                  <a:srgbClr val="3D4556"/>
+                  <a:srgbClr val="3A423F"/>
                 </a:solidFill>
                 <a:latin typeface="Arial" pitchFamily="34" charset="0"/>
                 <a:ea typeface="Arial" pitchFamily="34" charset="-122"/>
@@ -9698,7 +9698,7 @@
             <a:r>
               <a:rPr lang="en-US" sz="1150" dirty="0">
                 <a:solidFill>
-                  <a:srgbClr val="3D4556"/>
+                  <a:srgbClr val="3A423F"/>
                 </a:solidFill>
                 <a:latin typeface="Arial" pitchFamily="34" charset="0"/>
                 <a:ea typeface="Arial" pitchFamily="34" charset="-122"/>
@@ -9727,7 +9727,7 @@
           <a:noFill/>
           <a:ln w="9525">
             <a:solidFill>
-              <a:srgbClr val="E3E6EE"/>
+              <a:srgbClr val="E2E5E1"/>
             </a:solidFill>
             <a:prstDash val="solid"/>
           </a:ln>
@@ -9763,7 +9763,7 @@
             <a:r>
               <a:rPr lang="en-US" sz="1150" b="1" dirty="0">
                 <a:solidFill>
-                  <a:srgbClr val="0B0F19"/>
+                  <a:srgbClr val="14181A"/>
                 </a:solidFill>
                 <a:latin typeface="Arial" pitchFamily="34" charset="0"/>
                 <a:ea typeface="Arial" pitchFamily="34" charset="-122"/>
@@ -9805,7 +9805,7 @@
             <a:r>
               <a:rPr lang="en-US" sz="1150" dirty="0">
                 <a:solidFill>
-                  <a:srgbClr val="3D4556"/>
+                  <a:srgbClr val="3A423F"/>
                 </a:solidFill>
                 <a:latin typeface="Arial" pitchFamily="34" charset="0"/>
                 <a:ea typeface="Arial" pitchFamily="34" charset="-122"/>
@@ -9847,7 +9847,7 @@
             <a:r>
               <a:rPr lang="en-US" sz="1150" dirty="0">
                 <a:solidFill>
-                  <a:srgbClr val="3D4556"/>
+                  <a:srgbClr val="3A423F"/>
                 </a:solidFill>
                 <a:latin typeface="Arial" pitchFamily="34" charset="0"/>
                 <a:ea typeface="Arial" pitchFamily="34" charset="-122"/>
@@ -9876,7 +9876,7 @@
           <a:noFill/>
           <a:ln w="9525">
             <a:solidFill>
-              <a:srgbClr val="E3E6EE"/>
+              <a:srgbClr val="E2E5E1"/>
             </a:solidFill>
             <a:prstDash val="solid"/>
           </a:ln>
@@ -9912,7 +9912,7 @@
             <a:r>
               <a:rPr lang="en-US" sz="1150" b="1" dirty="0">
                 <a:solidFill>
-                  <a:srgbClr val="0B0F19"/>
+                  <a:srgbClr val="14181A"/>
                 </a:solidFill>
                 <a:latin typeface="Arial" pitchFamily="34" charset="0"/>
                 <a:ea typeface="Arial" pitchFamily="34" charset="-122"/>
@@ -9954,7 +9954,7 @@
             <a:r>
               <a:rPr lang="en-US" sz="1150" dirty="0">
                 <a:solidFill>
-                  <a:srgbClr val="3D4556"/>
+                  <a:srgbClr val="3A423F"/>
                 </a:solidFill>
                 <a:latin typeface="Arial" pitchFamily="34" charset="0"/>
                 <a:ea typeface="Arial" pitchFamily="34" charset="-122"/>
@@ -9996,7 +9996,7 @@
             <a:r>
               <a:rPr lang="en-US" sz="1150" dirty="0">
                 <a:solidFill>
-                  <a:srgbClr val="3D4556"/>
+                  <a:srgbClr val="3A423F"/>
                 </a:solidFill>
                 <a:latin typeface="Arial" pitchFamily="34" charset="0"/>
                 <a:ea typeface="Arial" pitchFamily="34" charset="-122"/>
@@ -10025,7 +10025,7 @@
           <a:noFill/>
           <a:ln w="9525">
             <a:solidFill>
-              <a:srgbClr val="E3E6EE"/>
+              <a:srgbClr val="E2E5E1"/>
             </a:solidFill>
             <a:prstDash val="solid"/>
           </a:ln>
@@ -10061,7 +10061,7 @@
             <a:r>
               <a:rPr lang="en-US" sz="1150" b="1" dirty="0">
                 <a:solidFill>
-                  <a:srgbClr val="0B0F19"/>
+                  <a:srgbClr val="14181A"/>
                 </a:solidFill>
                 <a:latin typeface="Arial" pitchFamily="34" charset="0"/>
                 <a:ea typeface="Arial" pitchFamily="34" charset="-122"/>
@@ -10103,7 +10103,7 @@
             <a:r>
               <a:rPr lang="en-US" sz="1150" dirty="0">
                 <a:solidFill>
-                  <a:srgbClr val="3D4556"/>
+                  <a:srgbClr val="3A423F"/>
                 </a:solidFill>
                 <a:latin typeface="Arial" pitchFamily="34" charset="0"/>
                 <a:ea typeface="Arial" pitchFamily="34" charset="-122"/>
@@ -10145,7 +10145,7 @@
             <a:r>
               <a:rPr lang="en-US" sz="1150" dirty="0">
                 <a:solidFill>
-                  <a:srgbClr val="3D4556"/>
+                  <a:srgbClr val="3A423F"/>
                 </a:solidFill>
                 <a:latin typeface="Arial" pitchFamily="34" charset="0"/>
                 <a:ea typeface="Arial" pitchFamily="34" charset="-122"/>
@@ -10174,7 +10174,7 @@
           <a:noFill/>
           <a:ln w="9525">
             <a:solidFill>
-              <a:srgbClr val="E3E6EE"/>
+              <a:srgbClr val="E2E5E1"/>
             </a:solidFill>
             <a:prstDash val="solid"/>
           </a:ln>
@@ -10210,7 +10210,7 @@
             <a:r>
               <a:rPr lang="en-US" sz="1150" b="1" dirty="0">
                 <a:solidFill>
-                  <a:srgbClr val="0B0F19"/>
+                  <a:srgbClr val="14181A"/>
                 </a:solidFill>
                 <a:latin typeface="Arial" pitchFamily="34" charset="0"/>
                 <a:ea typeface="Arial" pitchFamily="34" charset="-122"/>
@@ -10252,7 +10252,7 @@
             <a:r>
               <a:rPr lang="en-US" sz="1150" dirty="0">
                 <a:solidFill>
-                  <a:srgbClr val="3D4556"/>
+                  <a:srgbClr val="3A423F"/>
                 </a:solidFill>
                 <a:latin typeface="Arial" pitchFamily="34" charset="0"/>
                 <a:ea typeface="Arial" pitchFamily="34" charset="-122"/>
@@ -10294,7 +10294,7 @@
             <a:r>
               <a:rPr lang="en-US" sz="1150" dirty="0">
                 <a:solidFill>
-                  <a:srgbClr val="3D4556"/>
+                  <a:srgbClr val="3A423F"/>
                 </a:solidFill>
                 <a:latin typeface="Arial" pitchFamily="34" charset="0"/>
                 <a:ea typeface="Arial" pitchFamily="34" charset="-122"/>
@@ -10323,7 +10323,7 @@
           <a:noFill/>
           <a:ln w="9525">
             <a:solidFill>
-              <a:srgbClr val="E3E6EE"/>
+              <a:srgbClr val="E2E5E1"/>
             </a:solidFill>
             <a:prstDash val="solid"/>
           </a:ln>
@@ -10342,15 +10342,15 @@
           </a:xfrm>
           <a:prstGeom prst="roundRect">
             <a:avLst>
-              <a:gd name="adj" fmla="val 6667"/>
+              <a:gd name="adj" fmla="val 3333"/>
             </a:avLst>
           </a:prstGeom>
           <a:solidFill>
-            <a:srgbClr val="F4F5F9"/>
+            <a:srgbClr val="F2F3F1"/>
           </a:solidFill>
           <a:ln w="12700">
             <a:solidFill>
-              <a:srgbClr val="F4F5F9"/>
+              <a:srgbClr val="F2F3F1"/>
             </a:solidFill>
             <a:prstDash val="solid"/>
           </a:ln>
@@ -10383,7 +10383,7 @@
             <a:r>
               <a:rPr lang="en-US" sz="950" b="1" dirty="0">
                 <a:solidFill>
-                  <a:srgbClr val="5B6475"/>
+                  <a:srgbClr val="575F5C"/>
                 </a:solidFill>
                 <a:latin typeface="Arial" pitchFamily="34" charset="0"/>
                 <a:ea typeface="Arial" pitchFamily="34" charset="-122"/>
@@ -10425,7 +10425,7 @@
             <a:r>
               <a:rPr lang="en-US" sz="1150" i="1" dirty="0">
                 <a:solidFill>
-                  <a:srgbClr val="3D4556"/>
+                  <a:srgbClr val="3A423F"/>
                 </a:solidFill>
                 <a:latin typeface="Arial" pitchFamily="34" charset="0"/>
                 <a:ea typeface="Arial" pitchFamily="34" charset="-122"/>
@@ -10464,7 +10464,7 @@
             <a:r>
               <a:rPr lang="en-US" sz="900" dirty="0">
                 <a:solidFill>
-                  <a:srgbClr val="5B6475"/>
+                  <a:srgbClr val="575F5C"/>
                 </a:solidFill>
                 <a:latin typeface="Arial" pitchFamily="34" charset="0"/>
                 <a:ea typeface="Arial" pitchFamily="34" charset="-122"/>
@@ -10503,7 +10503,7 @@
             <a:r>
               <a:rPr lang="en-US" sz="900" dirty="0">
                 <a:solidFill>
-                  <a:srgbClr val="5B6475"/>
+                  <a:srgbClr val="575F5C"/>
                 </a:solidFill>
                 <a:latin typeface="Arial" pitchFamily="34" charset="0"/>
                 <a:ea typeface="Arial" pitchFamily="34" charset="-122"/>
@@ -10598,7 +10598,7 @@
             <a:r>
               <a:rPr lang="en-US" sz="1600" b="1" dirty="0">
                 <a:solidFill>
-                  <a:srgbClr val="0B0F19"/>
+                  <a:srgbClr val="14181A"/>
                 </a:solidFill>
                 <a:latin typeface="Arial" pitchFamily="34" charset="0"/>
                 <a:ea typeface="Arial" pitchFamily="34" charset="-122"/>
@@ -10637,7 +10637,7 @@
             <a:r>
               <a:rPr lang="en-US" sz="1000" dirty="0">
                 <a:solidFill>
-                  <a:srgbClr val="5B6475"/>
+                  <a:srgbClr val="575F5C"/>
                 </a:solidFill>
                 <a:latin typeface="Arial" pitchFamily="34" charset="0"/>
                 <a:ea typeface="Arial" pitchFamily="34" charset="-122"/>
@@ -10658,17 +10658,17 @@
         <p:spPr>
           <a:xfrm>
             <a:off x="731520" y="877824"/>
-            <a:ext cx="10725912" cy="25603"/>
+            <a:ext cx="10725912" cy="10973"/>
           </a:xfrm>
           <a:prstGeom prst="rect">
             <a:avLst/>
           </a:prstGeom>
           <a:solidFill>
-            <a:srgbClr val="38C9FF"/>
+            <a:srgbClr val="E2E5E1"/>
           </a:solidFill>
           <a:ln w="12700">
             <a:solidFill>
-              <a:srgbClr val="38C9FF"/>
+              <a:srgbClr val="E2E5E1"/>
             </a:solidFill>
             <a:prstDash val="solid"/>
           </a:ln>
@@ -10704,7 +10704,7 @@
             <a:r>
               <a:rPr lang="en-US" sz="2400" b="1" dirty="0">
                 <a:solidFill>
-                  <a:srgbClr val="4636B0"/>
+                  <a:srgbClr val="14181A"/>
                 </a:solidFill>
                 <a:latin typeface="Arial" pitchFamily="34" charset="0"/>
                 <a:ea typeface="Arial" pitchFamily="34" charset="-122"/>
@@ -10749,7 +10749,7 @@
             <a:r>
               <a:rPr lang="en-US" sz="1200" b="1" dirty="0">
                 <a:solidFill>
-                  <a:srgbClr val="0B0F19"/>
+                  <a:srgbClr val="14181A"/>
                 </a:solidFill>
                 <a:latin typeface="Arial" pitchFamily="34" charset="0"/>
                 <a:ea typeface="Arial" pitchFamily="34" charset="-122"/>
@@ -10769,7 +10769,7 @@
             <a:r>
               <a:rPr lang="en-US" sz="1200" dirty="0">
                 <a:solidFill>
-                  <a:srgbClr val="3D4556"/>
+                  <a:srgbClr val="3A423F"/>
                 </a:solidFill>
                 <a:latin typeface="Arial" pitchFamily="34" charset="0"/>
                 <a:ea typeface="Arial" pitchFamily="34" charset="-122"/>
@@ -10792,7 +10792,7 @@
             <a:r>
               <a:rPr lang="en-US" sz="1200" b="1" dirty="0">
                 <a:solidFill>
-                  <a:srgbClr val="0B0F19"/>
+                  <a:srgbClr val="14181A"/>
                 </a:solidFill>
                 <a:latin typeface="Arial" pitchFamily="34" charset="0"/>
                 <a:ea typeface="Arial" pitchFamily="34" charset="-122"/>
@@ -10812,7 +10812,7 @@
             <a:r>
               <a:rPr lang="en-US" sz="1200" dirty="0">
                 <a:solidFill>
-                  <a:srgbClr val="3D4556"/>
+                  <a:srgbClr val="3A423F"/>
                 </a:solidFill>
                 <a:latin typeface="Arial" pitchFamily="34" charset="0"/>
                 <a:ea typeface="Arial" pitchFamily="34" charset="-122"/>
@@ -10835,7 +10835,7 @@
             <a:r>
               <a:rPr lang="en-US" sz="1200" b="1" dirty="0">
                 <a:solidFill>
-                  <a:srgbClr val="0B0F19"/>
+                  <a:srgbClr val="14181A"/>
                 </a:solidFill>
                 <a:latin typeface="Arial" pitchFamily="34" charset="0"/>
                 <a:ea typeface="Arial" pitchFamily="34" charset="-122"/>
@@ -10855,7 +10855,7 @@
             <a:r>
               <a:rPr lang="en-US" sz="1200" dirty="0">
                 <a:solidFill>
-                  <a:srgbClr val="3D4556"/>
+                  <a:srgbClr val="3A423F"/>
                 </a:solidFill>
                 <a:latin typeface="Arial" pitchFamily="34" charset="0"/>
                 <a:ea typeface="Arial" pitchFamily="34" charset="-122"/>
@@ -10866,44 +10866,10 @@
             <a:endParaRPr lang="en-US" sz="1200" dirty="0"/>
           </a:p>
         </p:txBody>
-      </p:sp>
-      <p:sp>
-        <p:nvSpPr>
-          <p:cNvPr id="8" name="Shape 5"/>
-          <p:cNvSpPr/>
-          <p:nvPr/>
-        </p:nvSpPr>
-        <p:spPr>
-          <a:xfrm>
-            <a:off x="6858000" y="1371600"/>
-            <a:ext cx="2044624" cy="4297680"/>
-          </a:xfrm>
-          <a:prstGeom prst="roundRect">
-            <a:avLst>
-              <a:gd name="adj" fmla="val 13417"/>
-            </a:avLst>
-          </a:prstGeom>
-          <a:solidFill>
-            <a:srgbClr val="FFFFFF"/>
-          </a:solidFill>
-          <a:ln w="12700">
-            <a:solidFill>
-              <a:srgbClr val="FFFFFF"/>
-            </a:solidFill>
-            <a:prstDash val="solid"/>
-          </a:ln>
-          <a:effectLst>
-            <a:outerShdw sx="100000" sy="100000" kx="0" ky="0" algn="bl" rotWithShape="0" blurRad="177800" dist="38100" dir="5400000">
-              <a:srgbClr val="0B0F19">
-                <a:alpha val="18000"/>
-              </a:srgbClr>
-            </a:outerShdw>
-          </a:effectLst>
-        </p:spPr>
       </p:sp>
       <p:pic>
         <p:nvPicPr>
-          <p:cNvPr id="9" name="Image 1" descr="preencoded.png">    </p:cNvPr>
+          <p:cNvPr id="8" name="Image 1" descr="preencoded.png">    </p:cNvPr>
           <p:cNvPicPr>
             <a:picLocks noChangeAspect="1"/>
           </p:cNvPicPr>
@@ -10927,7 +10893,7 @@
       </p:pic>
       <p:sp>
         <p:nvSpPr>
-          <p:cNvPr id="10" name="Text 6"/>
+          <p:cNvPr id="9" name="Text 5"/>
           <p:cNvSpPr/>
           <p:nvPr/>
         </p:nvSpPr>
@@ -10952,7 +10918,7 @@
             <a:r>
               <a:rPr lang="en-US" sz="1000" i="1" dirty="0">
                 <a:solidFill>
-                  <a:srgbClr val="5B6475"/>
+                  <a:srgbClr val="575F5C"/>
                 </a:solidFill>
                 <a:latin typeface="Arial" pitchFamily="34" charset="0"/>
                 <a:ea typeface="Arial" pitchFamily="34" charset="-122"/>
@@ -10966,7 +10932,7 @@
       </p:sp>
       <p:sp>
         <p:nvSpPr>
-          <p:cNvPr id="11" name="Text 7"/>
+          <p:cNvPr id="10" name="Text 6"/>
           <p:cNvSpPr/>
           <p:nvPr/>
         </p:nvSpPr>
@@ -10991,7 +10957,7 @@
             <a:r>
               <a:rPr lang="en-US" sz="900" dirty="0">
                 <a:solidFill>
-                  <a:srgbClr val="5B6475"/>
+                  <a:srgbClr val="575F5C"/>
                 </a:solidFill>
                 <a:latin typeface="Arial" pitchFamily="34" charset="0"/>
                 <a:ea typeface="Arial" pitchFamily="34" charset="-122"/>
@@ -11005,7 +10971,7 @@
       </p:sp>
       <p:sp>
         <p:nvSpPr>
-          <p:cNvPr id="12" name="Text 8"/>
+          <p:cNvPr id="11" name="Text 7"/>
           <p:cNvSpPr/>
           <p:nvPr/>
         </p:nvSpPr>
@@ -11030,7 +10996,7 @@
             <a:r>
               <a:rPr lang="en-US" sz="900" dirty="0">
                 <a:solidFill>
-                  <a:srgbClr val="5B6475"/>
+                  <a:srgbClr val="575F5C"/>
                 </a:solidFill>
                 <a:latin typeface="Arial" pitchFamily="34" charset="0"/>
                 <a:ea typeface="Arial" pitchFamily="34" charset="-122"/>
@@ -11125,7 +11091,7 @@
             <a:r>
               <a:rPr lang="en-US" sz="1600" b="1" dirty="0">
                 <a:solidFill>
-                  <a:srgbClr val="0B0F19"/>
+                  <a:srgbClr val="14181A"/>
                 </a:solidFill>
                 <a:latin typeface="Arial" pitchFamily="34" charset="0"/>
                 <a:ea typeface="Arial" pitchFamily="34" charset="-122"/>
@@ -11164,7 +11130,7 @@
             <a:r>
               <a:rPr lang="en-US" sz="1000" dirty="0">
                 <a:solidFill>
-                  <a:srgbClr val="5B6475"/>
+                  <a:srgbClr val="575F5C"/>
                 </a:solidFill>
                 <a:latin typeface="Arial" pitchFamily="34" charset="0"/>
                 <a:ea typeface="Arial" pitchFamily="34" charset="-122"/>
@@ -11185,17 +11151,17 @@
         <p:spPr>
           <a:xfrm>
             <a:off x="731520" y="877824"/>
-            <a:ext cx="10725912" cy="25603"/>
+            <a:ext cx="10725912" cy="10973"/>
           </a:xfrm>
           <a:prstGeom prst="rect">
             <a:avLst/>
           </a:prstGeom>
           <a:solidFill>
-            <a:srgbClr val="38C9FF"/>
+            <a:srgbClr val="E2E5E1"/>
           </a:solidFill>
           <a:ln w="12700">
             <a:solidFill>
-              <a:srgbClr val="38C9FF"/>
+              <a:srgbClr val="E2E5E1"/>
             </a:solidFill>
             <a:prstDash val="solid"/>
           </a:ln>
@@ -11231,7 +11197,7 @@
             <a:r>
               <a:rPr lang="en-US" sz="2600" b="1" dirty="0">
                 <a:solidFill>
-                  <a:srgbClr val="4636B0"/>
+                  <a:srgbClr val="14181A"/>
                 </a:solidFill>
                 <a:latin typeface="Arial" pitchFamily="34" charset="0"/>
                 <a:ea typeface="Arial" pitchFamily="34" charset="-122"/>
@@ -11273,7 +11239,7 @@
             <a:r>
               <a:rPr lang="en-US" sz="1200" dirty="0">
                 <a:solidFill>
-                  <a:srgbClr val="3D4556"/>
+                  <a:srgbClr val="3A423F"/>
                 </a:solidFill>
                 <a:latin typeface="Arial" pitchFamily="34" charset="0"/>
                 <a:ea typeface="Arial" pitchFamily="34" charset="-122"/>
@@ -11312,7 +11278,7 @@
             <a:r>
               <a:rPr lang="en-US" sz="1000" b="1" dirty="0">
                 <a:solidFill>
-                  <a:srgbClr val="5B6475"/>
+                  <a:srgbClr val="575F5C"/>
                 </a:solidFill>
                 <a:latin typeface="Arial" pitchFamily="34" charset="0"/>
                 <a:ea typeface="Arial" pitchFamily="34" charset="-122"/>
@@ -11369,7 +11335,7 @@
           <a:noFill/>
           <a:ln w="9525">
             <a:solidFill>
-              <a:srgbClr val="E3E6EE"/>
+              <a:srgbClr val="E2E5E1"/>
             </a:solidFill>
             <a:prstDash val="solid"/>
           </a:ln>
@@ -11405,7 +11371,7 @@
             <a:r>
               <a:rPr lang="en-US" sz="1100" b="1" dirty="0">
                 <a:solidFill>
-                  <a:srgbClr val="0B0F19"/>
+                  <a:srgbClr val="14181A"/>
                 </a:solidFill>
                 <a:latin typeface="Arial" pitchFamily="34" charset="0"/>
                 <a:ea typeface="Arial" pitchFamily="34" charset="-122"/>
@@ -11447,7 +11413,7 @@
             <a:r>
               <a:rPr lang="en-US" sz="1100" dirty="0">
                 <a:solidFill>
-                  <a:srgbClr val="3D4556"/>
+                  <a:srgbClr val="3A423F"/>
                 </a:solidFill>
                 <a:latin typeface="Arial" pitchFamily="34" charset="0"/>
                 <a:ea typeface="Arial" pitchFamily="34" charset="-122"/>
@@ -11476,7 +11442,7 @@
           <a:noFill/>
           <a:ln w="9525">
             <a:solidFill>
-              <a:srgbClr val="E3E6EE"/>
+              <a:srgbClr val="E2E5E1"/>
             </a:solidFill>
             <a:prstDash val="solid"/>
           </a:ln>
@@ -11512,7 +11478,7 @@
             <a:r>
               <a:rPr lang="en-US" sz="1100" b="1" dirty="0">
                 <a:solidFill>
-                  <a:srgbClr val="0B0F19"/>
+                  <a:srgbClr val="14181A"/>
                 </a:solidFill>
                 <a:latin typeface="Arial" pitchFamily="34" charset="0"/>
                 <a:ea typeface="Arial" pitchFamily="34" charset="-122"/>
@@ -11554,7 +11520,7 @@
             <a:r>
               <a:rPr lang="en-US" sz="1100" dirty="0">
                 <a:solidFill>
-                  <a:srgbClr val="3D4556"/>
+                  <a:srgbClr val="3A423F"/>
                 </a:solidFill>
                 <a:latin typeface="Arial" pitchFamily="34" charset="0"/>
                 <a:ea typeface="Arial" pitchFamily="34" charset="-122"/>
@@ -11583,7 +11549,7 @@
           <a:noFill/>
           <a:ln w="9525">
             <a:solidFill>
-              <a:srgbClr val="E3E6EE"/>
+              <a:srgbClr val="E2E5E1"/>
             </a:solidFill>
             <a:prstDash val="solid"/>
           </a:ln>
@@ -11619,7 +11585,7 @@
             <a:r>
               <a:rPr lang="en-US" sz="1100" b="1" dirty="0">
                 <a:solidFill>
-                  <a:srgbClr val="0B0F19"/>
+                  <a:srgbClr val="14181A"/>
                 </a:solidFill>
                 <a:latin typeface="Arial" pitchFamily="34" charset="0"/>
                 <a:ea typeface="Arial" pitchFamily="34" charset="-122"/>
@@ -11661,7 +11627,7 @@
             <a:r>
               <a:rPr lang="en-US" sz="1100" dirty="0">
                 <a:solidFill>
-                  <a:srgbClr val="3D4556"/>
+                  <a:srgbClr val="3A423F"/>
                 </a:solidFill>
                 <a:latin typeface="Arial" pitchFamily="34" charset="0"/>
                 <a:ea typeface="Arial" pitchFamily="34" charset="-122"/>
@@ -11690,7 +11656,7 @@
           <a:noFill/>
           <a:ln w="9525">
             <a:solidFill>
-              <a:srgbClr val="E3E6EE"/>
+              <a:srgbClr val="E2E5E1"/>
             </a:solidFill>
             <a:prstDash val="solid"/>
           </a:ln>
@@ -11726,7 +11692,7 @@
             <a:r>
               <a:rPr lang="en-US" sz="1100" b="1" dirty="0">
                 <a:solidFill>
-                  <a:srgbClr val="0B0F19"/>
+                  <a:srgbClr val="14181A"/>
                 </a:solidFill>
                 <a:latin typeface="Arial" pitchFamily="34" charset="0"/>
                 <a:ea typeface="Arial" pitchFamily="34" charset="-122"/>
@@ -11768,7 +11734,7 @@
             <a:r>
               <a:rPr lang="en-US" sz="1100" dirty="0">
                 <a:solidFill>
-                  <a:srgbClr val="3D4556"/>
+                  <a:srgbClr val="3A423F"/>
                 </a:solidFill>
                 <a:latin typeface="Arial" pitchFamily="34" charset="0"/>
                 <a:ea typeface="Arial" pitchFamily="34" charset="-122"/>
@@ -11797,7 +11763,7 @@
           <a:noFill/>
           <a:ln w="9525">
             <a:solidFill>
-              <a:srgbClr val="E3E6EE"/>
+              <a:srgbClr val="E2E5E1"/>
             </a:solidFill>
             <a:prstDash val="solid"/>
           </a:ln>
@@ -11833,7 +11799,7 @@
             <a:r>
               <a:rPr lang="en-US" sz="1100" b="1" dirty="0">
                 <a:solidFill>
-                  <a:srgbClr val="0B0F19"/>
+                  <a:srgbClr val="14181A"/>
                 </a:solidFill>
                 <a:latin typeface="Arial" pitchFamily="34" charset="0"/>
                 <a:ea typeface="Arial" pitchFamily="34" charset="-122"/>
@@ -11875,7 +11841,7 @@
             <a:r>
               <a:rPr lang="en-US" sz="1100" dirty="0">
                 <a:solidFill>
-                  <a:srgbClr val="3D4556"/>
+                  <a:srgbClr val="3A423F"/>
                 </a:solidFill>
                 <a:latin typeface="Arial" pitchFamily="34" charset="0"/>
                 <a:ea typeface="Arial" pitchFamily="34" charset="-122"/>
@@ -11904,7 +11870,7 @@
           <a:noFill/>
           <a:ln w="9525">
             <a:solidFill>
-              <a:srgbClr val="E3E6EE"/>
+              <a:srgbClr val="E2E5E1"/>
             </a:solidFill>
             <a:prstDash val="solid"/>
           </a:ln>
@@ -11940,7 +11906,7 @@
             <a:r>
               <a:rPr lang="en-US" sz="1100" b="1" dirty="0">
                 <a:solidFill>
-                  <a:srgbClr val="0B0F19"/>
+                  <a:srgbClr val="14181A"/>
                 </a:solidFill>
                 <a:latin typeface="Arial" pitchFamily="34" charset="0"/>
                 <a:ea typeface="Arial" pitchFamily="34" charset="-122"/>
@@ -11982,7 +11948,7 @@
             <a:r>
               <a:rPr lang="en-US" sz="1100" dirty="0">
                 <a:solidFill>
-                  <a:srgbClr val="3D4556"/>
+                  <a:srgbClr val="3A423F"/>
                 </a:solidFill>
                 <a:latin typeface="Arial" pitchFamily="34" charset="0"/>
                 <a:ea typeface="Arial" pitchFamily="34" charset="-122"/>
@@ -12011,7 +11977,7 @@
           <a:noFill/>
           <a:ln w="9525">
             <a:solidFill>
-              <a:srgbClr val="E3E6EE"/>
+              <a:srgbClr val="E2E5E1"/>
             </a:solidFill>
             <a:prstDash val="solid"/>
           </a:ln>
@@ -12050,7 +12016,7 @@
             <a:r>
               <a:rPr lang="en-US" sz="1150" b="1" dirty="0">
                 <a:solidFill>
-                  <a:srgbClr val="0B0F19"/>
+                  <a:srgbClr val="14181A"/>
                 </a:solidFill>
                 <a:latin typeface="Arial" pitchFamily="34" charset="0"/>
                 <a:ea typeface="Arial" pitchFamily="34" charset="-122"/>
@@ -12070,7 +12036,7 @@
             <a:r>
               <a:rPr lang="en-US" sz="1150" dirty="0">
                 <a:solidFill>
-                  <a:srgbClr val="3D4556"/>
+                  <a:srgbClr val="3A423F"/>
                 </a:solidFill>
                 <a:latin typeface="Arial" pitchFamily="34" charset="0"/>
                 <a:ea typeface="Arial" pitchFamily="34" charset="-122"/>
@@ -12093,7 +12059,7 @@
             <a:r>
               <a:rPr lang="en-US" sz="1150" b="1" dirty="0">
                 <a:solidFill>
-                  <a:srgbClr val="0B0F19"/>
+                  <a:srgbClr val="14181A"/>
                 </a:solidFill>
                 <a:latin typeface="Arial" pitchFamily="34" charset="0"/>
                 <a:ea typeface="Arial" pitchFamily="34" charset="-122"/>
@@ -12113,13 +12079,13 @@
             <a:r>
               <a:rPr lang="en-US" sz="1150" dirty="0">
                 <a:solidFill>
-                  <a:srgbClr val="3D4556"/>
-                </a:solidFill>
-                <a:latin typeface="Arial" pitchFamily="34" charset="0"/>
-                <a:ea typeface="Arial" pitchFamily="34" charset="-122"/>
-                <a:cs typeface="Arial" pitchFamily="34" charset="-120"/>
-              </a:rPr>
-              <a:t>Par Managed Google Play, ou en chargeant l'APK que nous vous remettons comme application interne. Zebra, Honeywell et Datalogic fonctionnent ; le mode « application unique » est compatible.</a:t>
+                  <a:srgbClr val="3A423F"/>
+                </a:solidFill>
+                <a:latin typeface="Arial" pitchFamily="34" charset="0"/>
+                <a:ea typeface="Arial" pitchFamily="34" charset="-122"/>
+                <a:cs typeface="Arial" pitchFamily="34" charset="-120"/>
+              </a:rPr>
+              <a:t>Par Managed Google Play, ou en chargeant l'APK que nous vous remettons comme application interne. Le mode « application unique » est compatible. Nous n'avons pas éprouvé nous-mêmes les terminaux durcis du marché.</a:t>
             </a:r>
             <a:endParaRPr lang="en-US" sz="1150" dirty="0"/>
           </a:p>
@@ -12152,7 +12118,7 @@
             <a:r>
               <a:rPr lang="en-US" sz="900" dirty="0">
                 <a:solidFill>
-                  <a:srgbClr val="5B6475"/>
+                  <a:srgbClr val="575F5C"/>
                 </a:solidFill>
                 <a:latin typeface="Arial" pitchFamily="34" charset="0"/>
                 <a:ea typeface="Arial" pitchFamily="34" charset="-122"/>
@@ -12191,7 +12157,7 @@
             <a:r>
               <a:rPr lang="en-US" sz="900" dirty="0">
                 <a:solidFill>
-                  <a:srgbClr val="5B6475"/>
+                  <a:srgbClr val="575F5C"/>
                 </a:solidFill>
                 <a:latin typeface="Arial" pitchFamily="34" charset="0"/>
                 <a:ea typeface="Arial" pitchFamily="34" charset="-122"/>
@@ -12286,7 +12252,7 @@
             <a:r>
               <a:rPr lang="en-US" sz="1600" b="1" dirty="0">
                 <a:solidFill>
-                  <a:srgbClr val="0B0F19"/>
+                  <a:srgbClr val="14181A"/>
                 </a:solidFill>
                 <a:latin typeface="Arial" pitchFamily="34" charset="0"/>
                 <a:ea typeface="Arial" pitchFamily="34" charset="-122"/>
@@ -12325,7 +12291,7 @@
             <a:r>
               <a:rPr lang="en-US" sz="1000" dirty="0">
                 <a:solidFill>
-                  <a:srgbClr val="5B6475"/>
+                  <a:srgbClr val="575F5C"/>
                 </a:solidFill>
                 <a:latin typeface="Arial" pitchFamily="34" charset="0"/>
                 <a:ea typeface="Arial" pitchFamily="34" charset="-122"/>
@@ -12346,17 +12312,17 @@
         <p:spPr>
           <a:xfrm>
             <a:off x="731520" y="877824"/>
-            <a:ext cx="10725912" cy="25603"/>
+            <a:ext cx="10725912" cy="10973"/>
           </a:xfrm>
           <a:prstGeom prst="rect">
             <a:avLst/>
           </a:prstGeom>
           <a:solidFill>
-            <a:srgbClr val="38C9FF"/>
+            <a:srgbClr val="E2E5E1"/>
           </a:solidFill>
           <a:ln w="12700">
             <a:solidFill>
-              <a:srgbClr val="38C9FF"/>
+              <a:srgbClr val="E2E5E1"/>
             </a:solidFill>
             <a:prstDash val="solid"/>
           </a:ln>
@@ -12392,7 +12358,7 @@
             <a:r>
               <a:rPr lang="en-US" sz="2600" b="1" dirty="0">
                 <a:solidFill>
-                  <a:srgbClr val="4636B0"/>
+                  <a:srgbClr val="14181A"/>
                 </a:solidFill>
                 <a:latin typeface="Arial" pitchFamily="34" charset="0"/>
                 <a:ea typeface="Arial" pitchFamily="34" charset="-122"/>
@@ -12434,7 +12400,7 @@
             <a:r>
               <a:rPr lang="en-US" sz="1200" dirty="0">
                 <a:solidFill>
-                  <a:srgbClr val="3D4556"/>
+                  <a:srgbClr val="3A423F"/>
                 </a:solidFill>
                 <a:latin typeface="Arial" pitchFamily="34" charset="0"/>
                 <a:ea typeface="Arial" pitchFamily="34" charset="-122"/>
@@ -12461,11 +12427,11 @@
             <a:avLst/>
           </a:prstGeom>
           <a:solidFill>
-            <a:srgbClr val="4636B0"/>
+            <a:srgbClr val="14181A"/>
           </a:solidFill>
           <a:ln>
             <a:solidFill>
-              <a:srgbClr val="4636B0"/>
+              <a:srgbClr val="14181A"/>
             </a:solidFill>
           </a:ln>
         </p:spPr>
@@ -12518,7 +12484,7 @@
             <a:r>
               <a:rPr lang="en-US" sz="1300" b="1" dirty="0">
                 <a:solidFill>
-                  <a:srgbClr val="0B0F19"/>
+                  <a:srgbClr val="14181A"/>
                 </a:solidFill>
                 <a:latin typeface="Arial" pitchFamily="34" charset="0"/>
                 <a:ea typeface="Arial" pitchFamily="34" charset="-122"/>
@@ -12560,7 +12526,7 @@
             <a:r>
               <a:rPr lang="en-US" sz="1150" dirty="0">
                 <a:solidFill>
-                  <a:srgbClr val="3D4556"/>
+                  <a:srgbClr val="3A423F"/>
                 </a:solidFill>
                 <a:latin typeface="Arial" pitchFamily="34" charset="0"/>
                 <a:ea typeface="Arial" pitchFamily="34" charset="-122"/>
@@ -12587,11 +12553,11 @@
             <a:avLst/>
           </a:prstGeom>
           <a:solidFill>
-            <a:srgbClr val="4636B0"/>
+            <a:srgbClr val="14181A"/>
           </a:solidFill>
           <a:ln>
             <a:solidFill>
-              <a:srgbClr val="4636B0"/>
+              <a:srgbClr val="14181A"/>
             </a:solidFill>
           </a:ln>
         </p:spPr>
@@ -12644,7 +12610,7 @@
             <a:r>
               <a:rPr lang="en-US" sz="1300" b="1" dirty="0">
                 <a:solidFill>
-                  <a:srgbClr val="0B0F19"/>
+                  <a:srgbClr val="14181A"/>
                 </a:solidFill>
                 <a:latin typeface="Arial" pitchFamily="34" charset="0"/>
                 <a:ea typeface="Arial" pitchFamily="34" charset="-122"/>
@@ -12686,7 +12652,7 @@
             <a:r>
               <a:rPr lang="en-US" sz="1150" dirty="0">
                 <a:solidFill>
-                  <a:srgbClr val="3D4556"/>
+                  <a:srgbClr val="3A423F"/>
                 </a:solidFill>
                 <a:latin typeface="Arial" pitchFamily="34" charset="0"/>
                 <a:ea typeface="Arial" pitchFamily="34" charset="-122"/>
@@ -12713,11 +12679,11 @@
             <a:avLst/>
           </a:prstGeom>
           <a:solidFill>
-            <a:srgbClr val="4636B0"/>
+            <a:srgbClr val="14181A"/>
           </a:solidFill>
           <a:ln>
             <a:solidFill>
-              <a:srgbClr val="4636B0"/>
+              <a:srgbClr val="14181A"/>
             </a:solidFill>
           </a:ln>
         </p:spPr>
@@ -12770,7 +12736,7 @@
             <a:r>
               <a:rPr lang="en-US" sz="1300" b="1" dirty="0">
                 <a:solidFill>
-                  <a:srgbClr val="0B0F19"/>
+                  <a:srgbClr val="14181A"/>
                 </a:solidFill>
                 <a:latin typeface="Arial" pitchFamily="34" charset="0"/>
                 <a:ea typeface="Arial" pitchFamily="34" charset="-122"/>
@@ -12812,7 +12778,7 @@
             <a:r>
               <a:rPr lang="en-US" sz="1150" dirty="0">
                 <a:solidFill>
-                  <a:srgbClr val="3D4556"/>
+                  <a:srgbClr val="3A423F"/>
                 </a:solidFill>
                 <a:latin typeface="Arial" pitchFamily="34" charset="0"/>
                 <a:ea typeface="Arial" pitchFamily="34" charset="-122"/>
@@ -12839,11 +12805,11 @@
             <a:avLst/>
           </a:prstGeom>
           <a:solidFill>
-            <a:srgbClr val="5B6475"/>
+            <a:srgbClr val="575F5C"/>
           </a:solidFill>
           <a:ln>
             <a:solidFill>
-              <a:srgbClr val="5B6475"/>
+              <a:srgbClr val="575F5C"/>
             </a:solidFill>
           </a:ln>
         </p:spPr>
@@ -12896,7 +12862,7 @@
             <a:r>
               <a:rPr lang="en-US" sz="1300" b="1" dirty="0">
                 <a:solidFill>
-                  <a:srgbClr val="0B0F19"/>
+                  <a:srgbClr val="14181A"/>
                 </a:solidFill>
                 <a:latin typeface="Arial" pitchFamily="34" charset="0"/>
                 <a:ea typeface="Arial" pitchFamily="34" charset="-122"/>
@@ -12938,7 +12904,7 @@
             <a:r>
               <a:rPr lang="en-US" sz="1150" dirty="0">
                 <a:solidFill>
-                  <a:srgbClr val="3D4556"/>
+                  <a:srgbClr val="3A423F"/>
                 </a:solidFill>
                 <a:latin typeface="Arial" pitchFamily="34" charset="0"/>
                 <a:ea typeface="Arial" pitchFamily="34" charset="-122"/>
@@ -12977,7 +12943,7 @@
             <a:r>
               <a:rPr lang="en-US" sz="900" dirty="0">
                 <a:solidFill>
-                  <a:srgbClr val="5B6475"/>
+                  <a:srgbClr val="575F5C"/>
                 </a:solidFill>
                 <a:latin typeface="Arial" pitchFamily="34" charset="0"/>
                 <a:ea typeface="Arial" pitchFamily="34" charset="-122"/>
@@ -13016,7 +12982,7 @@
             <a:r>
               <a:rPr lang="en-US" sz="900" dirty="0">
                 <a:solidFill>
-                  <a:srgbClr val="5B6475"/>
+                  <a:srgbClr val="575F5C"/>
                 </a:solidFill>
                 <a:latin typeface="Arial" pitchFamily="34" charset="0"/>
                 <a:ea typeface="Arial" pitchFamily="34" charset="-122"/>
@@ -13111,7 +13077,7 @@
             <a:r>
               <a:rPr lang="en-US" sz="1600" b="1" dirty="0">
                 <a:solidFill>
-                  <a:srgbClr val="0B0F19"/>
+                  <a:srgbClr val="14181A"/>
                 </a:solidFill>
                 <a:latin typeface="Arial" pitchFamily="34" charset="0"/>
                 <a:ea typeface="Arial" pitchFamily="34" charset="-122"/>
@@ -13150,7 +13116,7 @@
             <a:r>
               <a:rPr lang="en-US" sz="1000" dirty="0">
                 <a:solidFill>
-                  <a:srgbClr val="5B6475"/>
+                  <a:srgbClr val="575F5C"/>
                 </a:solidFill>
                 <a:latin typeface="Arial" pitchFamily="34" charset="0"/>
                 <a:ea typeface="Arial" pitchFamily="34" charset="-122"/>
@@ -13171,17 +13137,17 @@
         <p:spPr>
           <a:xfrm>
             <a:off x="731520" y="877824"/>
-            <a:ext cx="10725912" cy="25603"/>
+            <a:ext cx="10725912" cy="10973"/>
           </a:xfrm>
           <a:prstGeom prst="rect">
             <a:avLst/>
           </a:prstGeom>
           <a:solidFill>
-            <a:srgbClr val="38C9FF"/>
+            <a:srgbClr val="E2E5E1"/>
           </a:solidFill>
           <a:ln w="12700">
             <a:solidFill>
-              <a:srgbClr val="38C9FF"/>
+              <a:srgbClr val="E2E5E1"/>
             </a:solidFill>
             <a:prstDash val="solid"/>
           </a:ln>
@@ -13217,7 +13183,7 @@
             <a:r>
               <a:rPr lang="en-US" sz="2600" b="1" dirty="0">
                 <a:solidFill>
-                  <a:srgbClr val="4636B0"/>
+                  <a:srgbClr val="14181A"/>
                 </a:solidFill>
                 <a:latin typeface="Arial" pitchFamily="34" charset="0"/>
                 <a:ea typeface="Arial" pitchFamily="34" charset="-122"/>
@@ -13246,7 +13212,7 @@
           <a:noFill/>
           <a:ln w="9525">
             <a:solidFill>
-              <a:srgbClr val="E3E6EE"/>
+              <a:srgbClr val="E2E5E1"/>
             </a:solidFill>
             <a:prstDash val="solid"/>
           </a:ln>
@@ -13267,11 +13233,11 @@
             <a:avLst/>
           </a:prstGeom>
           <a:solidFill>
-            <a:srgbClr val="4636B0"/>
+            <a:srgbClr val="1E4D3B"/>
           </a:solidFill>
           <a:ln>
             <a:solidFill>
-              <a:srgbClr val="4636B0"/>
+              <a:srgbClr val="1E4D3B"/>
             </a:solidFill>
           </a:ln>
         </p:spPr>
@@ -13324,7 +13290,7 @@
             <a:r>
               <a:rPr lang="en-US" sz="1600" b="1" dirty="0">
                 <a:solidFill>
-                  <a:srgbClr val="4636B0"/>
+                  <a:srgbClr val="14181A"/>
                 </a:solidFill>
                 <a:latin typeface="Arial" pitchFamily="34" charset="0"/>
                 <a:ea typeface="Arial" pitchFamily="34" charset="-122"/>
@@ -13366,7 +13332,7 @@
             <a:r>
               <a:rPr lang="en-US" sz="1150" dirty="0">
                 <a:solidFill>
-                  <a:srgbClr val="3D4556"/>
+                  <a:srgbClr val="3A423F"/>
                 </a:solidFill>
                 <a:latin typeface="Arial" pitchFamily="34" charset="0"/>
                 <a:ea typeface="Arial" pitchFamily="34" charset="-122"/>
@@ -13393,11 +13359,11 @@
             <a:avLst/>
           </a:prstGeom>
           <a:solidFill>
-            <a:srgbClr val="4636B0"/>
+            <a:srgbClr val="1E4D3B"/>
           </a:solidFill>
           <a:ln>
             <a:solidFill>
-              <a:srgbClr val="4636B0"/>
+              <a:srgbClr val="1E4D3B"/>
             </a:solidFill>
           </a:ln>
         </p:spPr>
@@ -13450,7 +13416,7 @@
             <a:r>
               <a:rPr lang="en-US" sz="1600" b="1" dirty="0">
                 <a:solidFill>
-                  <a:srgbClr val="4636B0"/>
+                  <a:srgbClr val="14181A"/>
                 </a:solidFill>
                 <a:latin typeface="Arial" pitchFamily="34" charset="0"/>
                 <a:ea typeface="Arial" pitchFamily="34" charset="-122"/>
@@ -13492,7 +13458,7 @@
             <a:r>
               <a:rPr lang="en-US" sz="1150" dirty="0">
                 <a:solidFill>
-                  <a:srgbClr val="3D4556"/>
+                  <a:srgbClr val="3A423F"/>
                 </a:solidFill>
                 <a:latin typeface="Arial" pitchFamily="34" charset="0"/>
                 <a:ea typeface="Arial" pitchFamily="34" charset="-122"/>
@@ -13519,11 +13485,11 @@
             <a:avLst/>
           </a:prstGeom>
           <a:solidFill>
-            <a:srgbClr val="4636B0"/>
+            <a:srgbClr val="1E4D3B"/>
           </a:solidFill>
           <a:ln>
             <a:solidFill>
-              <a:srgbClr val="4636B0"/>
+              <a:srgbClr val="1E4D3B"/>
             </a:solidFill>
           </a:ln>
         </p:spPr>
@@ -13576,7 +13542,7 @@
             <a:r>
               <a:rPr lang="en-US" sz="1600" b="1" dirty="0">
                 <a:solidFill>
-                  <a:srgbClr val="4636B0"/>
+                  <a:srgbClr val="14181A"/>
                 </a:solidFill>
                 <a:latin typeface="Arial" pitchFamily="34" charset="0"/>
                 <a:ea typeface="Arial" pitchFamily="34" charset="-122"/>
@@ -13618,7 +13584,7 @@
             <a:r>
               <a:rPr lang="en-US" sz="1150" dirty="0">
                 <a:solidFill>
-                  <a:srgbClr val="3D4556"/>
+                  <a:srgbClr val="3A423F"/>
                 </a:solidFill>
                 <a:latin typeface="Arial" pitchFamily="34" charset="0"/>
                 <a:ea typeface="Arial" pitchFamily="34" charset="-122"/>
@@ -13645,11 +13611,11 @@
             <a:avLst/>
           </a:prstGeom>
           <a:solidFill>
-            <a:srgbClr val="4636B0"/>
+            <a:srgbClr val="1E4D3B"/>
           </a:solidFill>
           <a:ln>
             <a:solidFill>
-              <a:srgbClr val="4636B0"/>
+              <a:srgbClr val="1E4D3B"/>
             </a:solidFill>
           </a:ln>
         </p:spPr>
@@ -13702,7 +13668,7 @@
             <a:r>
               <a:rPr lang="en-US" sz="1600" b="1" dirty="0">
                 <a:solidFill>
-                  <a:srgbClr val="4636B0"/>
+                  <a:srgbClr val="14181A"/>
                 </a:solidFill>
                 <a:latin typeface="Arial" pitchFamily="34" charset="0"/>
                 <a:ea typeface="Arial" pitchFamily="34" charset="-122"/>
@@ -13744,7 +13710,7 @@
             <a:r>
               <a:rPr lang="en-US" sz="1150" dirty="0">
                 <a:solidFill>
-                  <a:srgbClr val="3D4556"/>
+                  <a:srgbClr val="3A423F"/>
                 </a:solidFill>
                 <a:latin typeface="Arial" pitchFamily="34" charset="0"/>
                 <a:ea typeface="Arial" pitchFamily="34" charset="-122"/>
@@ -13769,15 +13735,15 @@
           </a:xfrm>
           <a:prstGeom prst="roundRect">
             <a:avLst>
-              <a:gd name="adj" fmla="val 7619"/>
+              <a:gd name="adj" fmla="val 3810"/>
             </a:avLst>
           </a:prstGeom>
           <a:solidFill>
-            <a:srgbClr val="F4F5F9"/>
+            <a:srgbClr val="F2F3F1"/>
           </a:solidFill>
           <a:ln w="12700">
             <a:solidFill>
-              <a:srgbClr val="F4F5F9"/>
+              <a:srgbClr val="F2F3F1"/>
             </a:solidFill>
             <a:prstDash val="solid"/>
           </a:ln>
@@ -13810,7 +13776,7 @@
             <a:r>
               <a:rPr lang="en-US" sz="950" b="1" dirty="0">
                 <a:solidFill>
-                  <a:srgbClr val="5B6475"/>
+                  <a:srgbClr val="575F5C"/>
                 </a:solidFill>
                 <a:latin typeface="Arial" pitchFamily="34" charset="0"/>
                 <a:ea typeface="Arial" pitchFamily="34" charset="-122"/>
@@ -13852,7 +13818,7 @@
             <a:r>
               <a:rPr lang="en-US" sz="1150" i="1" dirty="0">
                 <a:solidFill>
-                  <a:srgbClr val="3D4556"/>
+                  <a:srgbClr val="3A423F"/>
                 </a:solidFill>
                 <a:latin typeface="Arial" pitchFamily="34" charset="0"/>
                 <a:ea typeface="Arial" pitchFamily="34" charset="-122"/>
@@ -13891,7 +13857,7 @@
             <a:r>
               <a:rPr lang="en-US" sz="900" dirty="0">
                 <a:solidFill>
-                  <a:srgbClr val="5B6475"/>
+                  <a:srgbClr val="575F5C"/>
                 </a:solidFill>
                 <a:latin typeface="Arial" pitchFamily="34" charset="0"/>
                 <a:ea typeface="Arial" pitchFamily="34" charset="-122"/>
@@ -13930,7 +13896,7 @@
             <a:r>
               <a:rPr lang="en-US" sz="900" dirty="0">
                 <a:solidFill>
-                  <a:srgbClr val="5B6475"/>
+                  <a:srgbClr val="575F5C"/>
                 </a:solidFill>
                 <a:latin typeface="Arial" pitchFamily="34" charset="0"/>
                 <a:ea typeface="Arial" pitchFamily="34" charset="-122"/>
@@ -14025,7 +13991,7 @@
             <a:r>
               <a:rPr lang="en-US" sz="1600" b="1" dirty="0">
                 <a:solidFill>
-                  <a:srgbClr val="0B0F19"/>
+                  <a:srgbClr val="14181A"/>
                 </a:solidFill>
                 <a:latin typeface="Arial" pitchFamily="34" charset="0"/>
                 <a:ea typeface="Arial" pitchFamily="34" charset="-122"/>
@@ -14064,7 +14030,7 @@
             <a:r>
               <a:rPr lang="en-US" sz="1000" dirty="0">
                 <a:solidFill>
-                  <a:srgbClr val="5B6475"/>
+                  <a:srgbClr val="575F5C"/>
                 </a:solidFill>
                 <a:latin typeface="Arial" pitchFamily="34" charset="0"/>
                 <a:ea typeface="Arial" pitchFamily="34" charset="-122"/>
@@ -14085,17 +14051,17 @@
         <p:spPr>
           <a:xfrm>
             <a:off x="731520" y="877824"/>
-            <a:ext cx="10725912" cy="25603"/>
+            <a:ext cx="10725912" cy="10973"/>
           </a:xfrm>
           <a:prstGeom prst="rect">
             <a:avLst/>
           </a:prstGeom>
           <a:solidFill>
-            <a:srgbClr val="38C9FF"/>
+            <a:srgbClr val="E2E5E1"/>
           </a:solidFill>
           <a:ln w="12700">
             <a:solidFill>
-              <a:srgbClr val="38C9FF"/>
+              <a:srgbClr val="E2E5E1"/>
             </a:solidFill>
             <a:prstDash val="solid"/>
           </a:ln>
@@ -14131,7 +14097,7 @@
             <a:r>
               <a:rPr lang="en-US" sz="2400" b="1" dirty="0">
                 <a:solidFill>
-                  <a:srgbClr val="4636B0"/>
+                  <a:srgbClr val="14181A"/>
                 </a:solidFill>
                 <a:latin typeface="Arial" pitchFamily="34" charset="0"/>
                 <a:ea typeface="Arial" pitchFamily="34" charset="-122"/>
@@ -14176,7 +14142,7 @@
             <a:r>
               <a:rPr lang="en-US" sz="1200" b="1" dirty="0">
                 <a:solidFill>
-                  <a:srgbClr val="0B0F19"/>
+                  <a:srgbClr val="14181A"/>
                 </a:solidFill>
                 <a:latin typeface="Arial" pitchFamily="34" charset="0"/>
                 <a:ea typeface="Arial" pitchFamily="34" charset="-122"/>
@@ -14196,7 +14162,7 @@
             <a:r>
               <a:rPr lang="en-US" sz="1200" dirty="0">
                 <a:solidFill>
-                  <a:srgbClr val="3D4556"/>
+                  <a:srgbClr val="3A423F"/>
                 </a:solidFill>
                 <a:latin typeface="Arial" pitchFamily="34" charset="0"/>
                 <a:ea typeface="Arial" pitchFamily="34" charset="-122"/>
@@ -14219,7 +14185,7 @@
             <a:r>
               <a:rPr lang="en-US" sz="1200" b="1" dirty="0">
                 <a:solidFill>
-                  <a:srgbClr val="0B0F19"/>
+                  <a:srgbClr val="14181A"/>
                 </a:solidFill>
                 <a:latin typeface="Arial" pitchFamily="34" charset="0"/>
                 <a:ea typeface="Arial" pitchFamily="34" charset="-122"/>
@@ -14239,7 +14205,7 @@
             <a:r>
               <a:rPr lang="en-US" sz="1200" dirty="0">
                 <a:solidFill>
-                  <a:srgbClr val="3D4556"/>
+                  <a:srgbClr val="3A423F"/>
                 </a:solidFill>
                 <a:latin typeface="Arial" pitchFamily="34" charset="0"/>
                 <a:ea typeface="Arial" pitchFamily="34" charset="-122"/>
@@ -14262,7 +14228,7 @@
             <a:r>
               <a:rPr lang="en-US" sz="1200" b="1" dirty="0">
                 <a:solidFill>
-                  <a:srgbClr val="0B0F19"/>
+                  <a:srgbClr val="14181A"/>
                 </a:solidFill>
                 <a:latin typeface="Arial" pitchFamily="34" charset="0"/>
                 <a:ea typeface="Arial" pitchFamily="34" charset="-122"/>
@@ -14282,7 +14248,7 @@
             <a:r>
               <a:rPr lang="en-US" sz="1200" dirty="0">
                 <a:solidFill>
-                  <a:srgbClr val="3D4556"/>
+                  <a:srgbClr val="3A423F"/>
                 </a:solidFill>
                 <a:latin typeface="Arial" pitchFamily="34" charset="0"/>
                 <a:ea typeface="Arial" pitchFamily="34" charset="-122"/>
@@ -14307,7 +14273,7 @@
           </a:xfrm>
           <a:prstGeom prst="roundRect">
             <a:avLst>
-              <a:gd name="adj" fmla="val 1825"/>
+              <a:gd name="adj" fmla="val 912"/>
             </a:avLst>
           </a:prstGeom>
           <a:solidFill>
@@ -14315,7 +14281,7 @@
           </a:solidFill>
           <a:ln w="12700">
             <a:solidFill>
-              <a:srgbClr val="E3E6EE"/>
+              <a:srgbClr val="E2E5E1"/>
             </a:solidFill>
             <a:prstDash val="solid"/>
           </a:ln>
@@ -14372,7 +14338,7 @@
             <a:r>
               <a:rPr lang="en-US" sz="1000" i="1" dirty="0">
                 <a:solidFill>
-                  <a:srgbClr val="5B6475"/>
+                  <a:srgbClr val="575F5C"/>
                 </a:solidFill>
                 <a:latin typeface="Arial" pitchFamily="34" charset="0"/>
                 <a:ea typeface="Arial" pitchFamily="34" charset="-122"/>
@@ -14411,7 +14377,7 @@
             <a:r>
               <a:rPr lang="en-US" sz="900" dirty="0">
                 <a:solidFill>
-                  <a:srgbClr val="5B6475"/>
+                  <a:srgbClr val="575F5C"/>
                 </a:solidFill>
                 <a:latin typeface="Arial" pitchFamily="34" charset="0"/>
                 <a:ea typeface="Arial" pitchFamily="34" charset="-122"/>
@@ -14450,7 +14416,7 @@
             <a:r>
               <a:rPr lang="en-US" sz="900" dirty="0">
                 <a:solidFill>
-                  <a:srgbClr val="5B6475"/>
+                  <a:srgbClr val="575F5C"/>
                 </a:solidFill>
                 <a:latin typeface="Arial" pitchFamily="34" charset="0"/>
                 <a:ea typeface="Arial" pitchFamily="34" charset="-122"/>
